--- a/assets/templates/MS3L_poster_template.pptx
+++ b/assets/templates/MS3L_poster_template.pptx
@@ -3148,10 +3148,10 @@
           <a:gradFill rotWithShape="1">
             <a:gsLst>
               <a:gs pos="0">
-                <a:srgbClr val="005CA5"/>
+                <a:srgbClr val="0075C2"/>
               </a:gs>
               <a:gs pos="100000">
-                <a:srgbClr val="089892"/>
+                <a:srgbClr val="00ADA9"/>
               </a:gs>
             </a:gsLst>
             <a:lin scaled="0" ang="2700000"/>
@@ -3410,10 +3410,10 @@
           <a:gradFill rotWithShape="1">
             <a:gsLst>
               <a:gs pos="0">
-                <a:srgbClr val="005CA5"/>
+                <a:srgbClr val="0075C2"/>
               </a:gs>
               <a:gs pos="100000">
-                <a:srgbClr val="089892"/>
+                <a:srgbClr val="00ADA9"/>
               </a:gs>
             </a:gsLst>
             <a:lin scaled="0" ang="0"/>
@@ -3500,10 +3500,10 @@
           <a:gradFill rotWithShape="1">
             <a:gsLst>
               <a:gs pos="0">
-                <a:srgbClr val="005CA5"/>
+                <a:srgbClr val="0075C2"/>
               </a:gs>
               <a:gs pos="100000">
-                <a:srgbClr val="089892"/>
+                <a:srgbClr val="00ADA9"/>
               </a:gs>
             </a:gsLst>
             <a:lin scaled="0" ang="0"/>
@@ -3636,10 +3636,10 @@
           <a:gradFill rotWithShape="1">
             <a:gsLst>
               <a:gs pos="0">
-                <a:srgbClr val="005CA5"/>
+                <a:srgbClr val="0075C2"/>
               </a:gs>
               <a:gs pos="100000">
-                <a:srgbClr val="089892"/>
+                <a:srgbClr val="00ADA9"/>
               </a:gs>
             </a:gsLst>
             <a:lin scaled="0" ang="0"/>
@@ -3726,10 +3726,10 @@
           <a:gradFill rotWithShape="1">
             <a:gsLst>
               <a:gs pos="0">
-                <a:srgbClr val="005CA5"/>
+                <a:srgbClr val="0075C2"/>
               </a:gs>
               <a:gs pos="100000">
-                <a:srgbClr val="089892"/>
+                <a:srgbClr val="00ADA9"/>
               </a:gs>
             </a:gsLst>
             <a:lin scaled="0" ang="0"/>
@@ -3862,10 +3862,10 @@
           <a:gradFill rotWithShape="1">
             <a:gsLst>
               <a:gs pos="0">
-                <a:srgbClr val="005CA5"/>
+                <a:srgbClr val="0075C2"/>
               </a:gs>
               <a:gs pos="100000">
-                <a:srgbClr val="089892"/>
+                <a:srgbClr val="00ADA9"/>
               </a:gs>
             </a:gsLst>
             <a:lin scaled="0" ang="0"/>
@@ -3952,10 +3952,10 @@
           <a:gradFill rotWithShape="1">
             <a:gsLst>
               <a:gs pos="0">
-                <a:srgbClr val="005CA5"/>
+                <a:srgbClr val="0075C2"/>
               </a:gs>
               <a:gs pos="100000">
-                <a:srgbClr val="089892"/>
+                <a:srgbClr val="00ADA9"/>
               </a:gs>
             </a:gsLst>
             <a:lin scaled="0" ang="0"/>
@@ -4088,10 +4088,10 @@
           <a:gradFill rotWithShape="1">
             <a:gsLst>
               <a:gs pos="0">
-                <a:srgbClr val="005CA5"/>
+                <a:srgbClr val="0075C2"/>
               </a:gs>
               <a:gs pos="100000">
-                <a:srgbClr val="089892"/>
+                <a:srgbClr val="00ADA9"/>
               </a:gs>
             </a:gsLst>
             <a:lin scaled="0" ang="0"/>
@@ -4307,10 +4307,10 @@
           <a:gradFill rotWithShape="1">
             <a:gsLst>
               <a:gs pos="0">
-                <a:srgbClr val="005CA5"/>
+                <a:srgbClr val="0075C2"/>
               </a:gs>
               <a:gs pos="100000">
-                <a:srgbClr val="089892"/>
+                <a:srgbClr val="00ADA9"/>
               </a:gs>
             </a:gsLst>
             <a:lin scaled="0" ang="0"/>
@@ -4526,10 +4526,10 @@
           <a:gradFill rotWithShape="1">
             <a:gsLst>
               <a:gs pos="0">
-                <a:srgbClr val="005CA5"/>
+                <a:srgbClr val="0075C2"/>
               </a:gs>
               <a:gs pos="100000">
-                <a:srgbClr val="089892"/>
+                <a:srgbClr val="00ADA9"/>
               </a:gs>
             </a:gsLst>
             <a:lin scaled="0" ang="0"/>
@@ -4616,10 +4616,10 @@
           <a:gradFill rotWithShape="1">
             <a:gsLst>
               <a:gs pos="0">
-                <a:srgbClr val="005CA5"/>
+                <a:srgbClr val="0075C2"/>
               </a:gs>
               <a:gs pos="100000">
-                <a:srgbClr val="089892"/>
+                <a:srgbClr val="00ADA9"/>
               </a:gs>
             </a:gsLst>
             <a:lin scaled="0" ang="0"/>
@@ -4752,10 +4752,10 @@
           <a:gradFill rotWithShape="1">
             <a:gsLst>
               <a:gs pos="0">
-                <a:srgbClr val="005CA5"/>
+                <a:srgbClr val="0075C2"/>
               </a:gs>
               <a:gs pos="100000">
-                <a:srgbClr val="089892"/>
+                <a:srgbClr val="00ADA9"/>
               </a:gs>
             </a:gsLst>
             <a:lin scaled="0" ang="0"/>
@@ -4842,10 +4842,10 @@
           <a:gradFill rotWithShape="1">
             <a:gsLst>
               <a:gs pos="0">
-                <a:srgbClr val="005CA5"/>
+                <a:srgbClr val="0075C2"/>
               </a:gs>
               <a:gs pos="100000">
-                <a:srgbClr val="089892"/>
+                <a:srgbClr val="00ADA9"/>
               </a:gs>
             </a:gsLst>
             <a:lin scaled="0" ang="0"/>
@@ -4891,7 +4891,7 @@
             <a:avLst/>
           </a:prstGeom>
           <a:solidFill>
-            <a:srgbClr val="089892"/>
+            <a:srgbClr val="00ADA9"/>
           </a:solidFill>
           <a:ln>
             <a:noFill/>
@@ -4973,7 +4973,7 @@
             <a:avLst/>
           </a:prstGeom>
           <a:solidFill>
-            <a:srgbClr val="089892"/>
+            <a:srgbClr val="00ADA9"/>
           </a:solidFill>
           <a:ln>
             <a:noFill/>
@@ -5055,7 +5055,7 @@
             <a:avLst/>
           </a:prstGeom>
           <a:solidFill>
-            <a:srgbClr val="089892"/>
+            <a:srgbClr val="00ADA9"/>
           </a:solidFill>
           <a:ln>
             <a:noFill/>
@@ -5178,10 +5178,10 @@
           <a:gradFill rotWithShape="1">
             <a:gsLst>
               <a:gs pos="0">
-                <a:srgbClr val="005CA5"/>
+                <a:srgbClr val="0075C2"/>
               </a:gs>
               <a:gs pos="100000">
-                <a:srgbClr val="089892"/>
+                <a:srgbClr val="00ADA9"/>
               </a:gs>
             </a:gsLst>
             <a:lin scaled="0" ang="2700000"/>
@@ -5324,7 +5324,7 @@
                 </a:solidFill>
                 <a:latin typeface="Noto Sans KR"/>
               </a:rPr>
-              <a:t>https://enthusiast87.github.io/MS3L.io/</a:t>
+              <a:t>https://ms3l.org</a:t>
             </a:r>
           </a:p>
         </p:txBody>

--- a/assets/templates/MS3L_poster_template.pptx
+++ b/assets/templates/MS3L_poster_template.pptx
@@ -3140,7 +3140,7 @@
         <p:spPr>
           <a:xfrm>
             <a:off x="0" y="0"/>
-            <a:ext cx="32918400" cy="8595360"/>
+            <a:ext cx="32918400" cy="5852160"/>
           </a:xfrm>
           <a:prstGeom prst="rect">
             <a:avLst/>
@@ -3198,8 +3198,8 @@
         </p:blipFill>
         <p:spPr>
           <a:xfrm>
-            <a:off x="1463040" y="822960"/>
-            <a:ext cx="12344400" cy="2132215"/>
+            <a:off x="1463040" y="566928"/>
+            <a:ext cx="9692640" cy="1674183"/>
           </a:xfrm>
           <a:prstGeom prst="rect">
             <a:avLst/>
@@ -3222,24 +3222,48 @@
         </p:blipFill>
         <p:spPr>
           <a:xfrm>
-            <a:off x="29077920" y="914400"/>
-            <a:ext cx="2468880" cy="2468880"/>
+            <a:off x="29535119" y="566928"/>
+            <a:ext cx="1920240" cy="1920240"/>
           </a:xfrm>
           <a:prstGeom prst="rect">
             <a:avLst/>
           </a:prstGeom>
         </p:spPr>
       </p:pic>
-      <p:sp>
-        <p:nvSpPr>
-          <p:cNvPr id="6" name="TextBox 5"/>
+      <p:pic>
+        <p:nvPicPr>
+          <p:cNvPr id="6" name="Picture 5" descr="krict-logo-white.png"/>
+          <p:cNvPicPr>
+            <a:picLocks noChangeAspect="1"/>
+          </p:cNvPicPr>
+          <p:nvPr/>
+        </p:nvPicPr>
+        <p:blipFill>
+          <a:blip r:embed="rId4"/>
+          <a:stretch>
+            <a:fillRect/>
+          </a:stretch>
+        </p:blipFill>
+        <p:spPr>
+          <a:xfrm>
+            <a:off x="25237440" y="960120"/>
+            <a:ext cx="3657600" cy="1155192"/>
+          </a:xfrm>
+          <a:prstGeom prst="rect">
+            <a:avLst/>
+          </a:prstGeom>
+        </p:spPr>
+      </p:pic>
+      <p:sp>
+        <p:nvSpPr>
+          <p:cNvPr id="7" name="TextBox 6"/>
           <p:cNvSpPr txBox="1"/>
           <p:nvPr/>
         </p:nvSpPr>
         <p:spPr>
           <a:xfrm>
-            <a:off x="1463040" y="3291840"/>
-            <a:ext cx="30175200" cy="2377440"/>
+            <a:off x="1463040" y="2331720"/>
+            <a:ext cx="30175200" cy="1920240"/>
           </a:xfrm>
           <a:prstGeom prst="rect">
             <a:avLst/>
@@ -3254,11 +3278,11 @@
           <a:p>
             <a:pPr algn="l">
               <a:lnSpc>
-                <a:spcPct val="105000"/>
+                <a:spcPct val="106000"/>
               </a:lnSpc>
             </a:pPr>
             <a:r>
-              <a:rPr sz="7800" b="1">
+              <a:rPr sz="6000" b="1">
                 <a:solidFill>
                   <a:srgbClr val="FFFFFF"/>
                 </a:solidFill>
@@ -3271,14 +3295,14 @@
       </p:sp>
       <p:sp>
         <p:nvSpPr>
-          <p:cNvPr id="7" name="TextBox 6"/>
+          <p:cNvPr id="8" name="TextBox 7"/>
           <p:cNvSpPr txBox="1"/>
           <p:nvPr/>
         </p:nvSpPr>
         <p:spPr>
           <a:xfrm>
-            <a:off x="1463040" y="5989320"/>
-            <a:ext cx="30175200" cy="822960"/>
+            <a:off x="1463040" y="4133087"/>
+            <a:ext cx="30175200" cy="731520"/>
           </a:xfrm>
           <a:prstGeom prst="rect">
             <a:avLst/>
@@ -3297,7 +3321,7 @@
               </a:lnSpc>
             </a:pPr>
             <a:r>
-              <a:rPr sz="3400" b="1">
+              <a:rPr sz="2800" b="1">
                 <a:solidFill>
                   <a:srgbClr val="E2F4F7"/>
                 </a:solidFill>
@@ -3310,14 +3334,14 @@
       </p:sp>
       <p:sp>
         <p:nvSpPr>
-          <p:cNvPr id="8" name="TextBox 7"/>
+          <p:cNvPr id="9" name="TextBox 8"/>
           <p:cNvSpPr txBox="1"/>
           <p:nvPr/>
         </p:nvSpPr>
         <p:spPr>
           <a:xfrm>
-            <a:off x="1463040" y="6903720"/>
-            <a:ext cx="30175200" cy="1371600"/>
+            <a:off x="1463040" y="4846320"/>
+            <a:ext cx="30175200" cy="1097280"/>
           </a:xfrm>
           <a:prstGeom prst="rect">
             <a:avLst/>
@@ -3332,11 +3356,11 @@
           <a:p>
             <a:pPr algn="l">
               <a:lnSpc>
-                <a:spcPct val="135000"/>
+                <a:spcPct val="132000"/>
               </a:lnSpc>
             </a:pPr>
             <a:r>
-              <a:rPr sz="2400" b="0">
+              <a:rPr sz="2000" b="0">
                 <a:solidFill>
                   <a:srgbClr val="BFE9EE"/>
                 </a:solidFill>
@@ -3350,13 +3374,13 @@
       </p:sp>
       <p:sp>
         <p:nvSpPr>
-          <p:cNvPr id="9" name="Rectangle 8"/>
+          <p:cNvPr id="10" name="Rectangle 9"/>
           <p:cNvSpPr/>
           <p:nvPr/>
         </p:nvSpPr>
         <p:spPr>
           <a:xfrm>
-            <a:off x="1463040" y="9875520"/>
+            <a:off x="1463040" y="7132320"/>
             <a:ext cx="9326880" cy="10515600"/>
           </a:xfrm>
           <a:prstGeom prst="rect">
@@ -3395,13 +3419,13 @@
       </p:sp>
       <p:sp>
         <p:nvSpPr>
-          <p:cNvPr id="10" name="Rectangle 9"/>
+          <p:cNvPr id="11" name="Rectangle 10"/>
           <p:cNvSpPr/>
           <p:nvPr/>
         </p:nvSpPr>
         <p:spPr>
           <a:xfrm>
-            <a:off x="1463040" y="9875520"/>
+            <a:off x="1463040" y="7132320"/>
             <a:ext cx="9326880" cy="146304"/>
           </a:xfrm>
           <a:prstGeom prst="rect">
@@ -3446,13 +3470,13 @@
       </p:sp>
       <p:sp>
         <p:nvSpPr>
-          <p:cNvPr id="11" name="TextBox 10"/>
+          <p:cNvPr id="12" name="TextBox 11"/>
           <p:cNvSpPr txBox="1"/>
           <p:nvPr/>
         </p:nvSpPr>
         <p:spPr>
           <a:xfrm>
-            <a:off x="2194560" y="10469880"/>
+            <a:off x="2194560" y="7726680"/>
             <a:ext cx="7863840" cy="914400"/>
           </a:xfrm>
           <a:prstGeom prst="rect">
@@ -3485,13 +3509,13 @@
       </p:sp>
       <p:sp>
         <p:nvSpPr>
-          <p:cNvPr id="12" name="Rectangle 11"/>
+          <p:cNvPr id="13" name="Rectangle 12"/>
           <p:cNvSpPr/>
           <p:nvPr/>
         </p:nvSpPr>
         <p:spPr>
           <a:xfrm>
-            <a:off x="2194560" y="11475720"/>
+            <a:off x="2194560" y="8732520"/>
             <a:ext cx="3108960" cy="118872"/>
           </a:xfrm>
           <a:prstGeom prst="rect">
@@ -3536,13 +3560,13 @@
       </p:sp>
       <p:sp>
         <p:nvSpPr>
-          <p:cNvPr id="13" name="TextBox 12"/>
+          <p:cNvPr id="14" name="TextBox 13"/>
           <p:cNvSpPr txBox="1"/>
           <p:nvPr/>
         </p:nvSpPr>
         <p:spPr>
           <a:xfrm>
-            <a:off x="2194560" y="11978640"/>
+            <a:off x="2194560" y="9235440"/>
             <a:ext cx="7863840" cy="7772400"/>
           </a:xfrm>
           <a:prstGeom prst="rect">
@@ -3576,13 +3600,13 @@
       </p:sp>
       <p:sp>
         <p:nvSpPr>
-          <p:cNvPr id="14" name="Rectangle 13"/>
+          <p:cNvPr id="15" name="Rectangle 14"/>
           <p:cNvSpPr/>
           <p:nvPr/>
         </p:nvSpPr>
         <p:spPr>
           <a:xfrm>
-            <a:off x="1463040" y="21122640"/>
+            <a:off x="1463040" y="18379440"/>
             <a:ext cx="9326880" cy="10515600"/>
           </a:xfrm>
           <a:prstGeom prst="rect">
@@ -3621,13 +3645,13 @@
       </p:sp>
       <p:sp>
         <p:nvSpPr>
-          <p:cNvPr id="15" name="Rectangle 14"/>
+          <p:cNvPr id="16" name="Rectangle 15"/>
           <p:cNvSpPr/>
           <p:nvPr/>
         </p:nvSpPr>
         <p:spPr>
           <a:xfrm>
-            <a:off x="1463040" y="21122640"/>
+            <a:off x="1463040" y="18379440"/>
             <a:ext cx="9326880" cy="146304"/>
           </a:xfrm>
           <a:prstGeom prst="rect">
@@ -3672,13 +3696,13 @@
       </p:sp>
       <p:sp>
         <p:nvSpPr>
-          <p:cNvPr id="16" name="TextBox 15"/>
+          <p:cNvPr id="17" name="TextBox 16"/>
           <p:cNvSpPr txBox="1"/>
           <p:nvPr/>
         </p:nvSpPr>
         <p:spPr>
           <a:xfrm>
-            <a:off x="2194560" y="21717000"/>
+            <a:off x="2194560" y="18973800"/>
             <a:ext cx="7863840" cy="914400"/>
           </a:xfrm>
           <a:prstGeom prst="rect">
@@ -3711,13 +3735,13 @@
       </p:sp>
       <p:sp>
         <p:nvSpPr>
-          <p:cNvPr id="17" name="Rectangle 16"/>
+          <p:cNvPr id="18" name="Rectangle 17"/>
           <p:cNvSpPr/>
           <p:nvPr/>
         </p:nvSpPr>
         <p:spPr>
           <a:xfrm>
-            <a:off x="2194560" y="22722840"/>
+            <a:off x="2194560" y="19979640"/>
             <a:ext cx="3108960" cy="118872"/>
           </a:xfrm>
           <a:prstGeom prst="rect">
@@ -3762,13 +3786,13 @@
       </p:sp>
       <p:sp>
         <p:nvSpPr>
-          <p:cNvPr id="18" name="TextBox 17"/>
+          <p:cNvPr id="19" name="TextBox 18"/>
           <p:cNvSpPr txBox="1"/>
           <p:nvPr/>
         </p:nvSpPr>
         <p:spPr>
           <a:xfrm>
-            <a:off x="2194560" y="23225760"/>
+            <a:off x="2194560" y="20482560"/>
             <a:ext cx="7863840" cy="7772400"/>
           </a:xfrm>
           <a:prstGeom prst="rect">
@@ -3802,14 +3826,14 @@
       </p:sp>
       <p:sp>
         <p:nvSpPr>
-          <p:cNvPr id="19" name="Rectangle 18"/>
+          <p:cNvPr id="20" name="Rectangle 19"/>
           <p:cNvSpPr/>
           <p:nvPr/>
         </p:nvSpPr>
         <p:spPr>
           <a:xfrm>
-            <a:off x="1463040" y="32369760"/>
-            <a:ext cx="9326880" cy="7498080"/>
+            <a:off x="1463040" y="29626560"/>
+            <a:ext cx="9326880" cy="10241280"/>
           </a:xfrm>
           <a:prstGeom prst="rect">
             <a:avLst/>
@@ -3847,13 +3871,13 @@
       </p:sp>
       <p:sp>
         <p:nvSpPr>
-          <p:cNvPr id="20" name="Rectangle 19"/>
+          <p:cNvPr id="21" name="Rectangle 20"/>
           <p:cNvSpPr/>
           <p:nvPr/>
         </p:nvSpPr>
         <p:spPr>
           <a:xfrm>
-            <a:off x="1463040" y="32369760"/>
+            <a:off x="1463040" y="29626560"/>
             <a:ext cx="9326880" cy="146304"/>
           </a:xfrm>
           <a:prstGeom prst="rect">
@@ -3898,13 +3922,13 @@
       </p:sp>
       <p:sp>
         <p:nvSpPr>
-          <p:cNvPr id="21" name="TextBox 20"/>
+          <p:cNvPr id="22" name="TextBox 21"/>
           <p:cNvSpPr txBox="1"/>
           <p:nvPr/>
         </p:nvSpPr>
         <p:spPr>
           <a:xfrm>
-            <a:off x="2194560" y="32964120"/>
+            <a:off x="2194560" y="30220920"/>
             <a:ext cx="7863840" cy="914400"/>
           </a:xfrm>
           <a:prstGeom prst="rect">
@@ -3937,13 +3961,13 @@
       </p:sp>
       <p:sp>
         <p:nvSpPr>
-          <p:cNvPr id="22" name="Rectangle 21"/>
+          <p:cNvPr id="23" name="Rectangle 22"/>
           <p:cNvSpPr/>
           <p:nvPr/>
         </p:nvSpPr>
         <p:spPr>
           <a:xfrm>
-            <a:off x="2194560" y="33969960"/>
+            <a:off x="2194560" y="31226760"/>
             <a:ext cx="3108960" cy="118872"/>
           </a:xfrm>
           <a:prstGeom prst="rect">
@@ -3988,14 +4012,14 @@
       </p:sp>
       <p:sp>
         <p:nvSpPr>
-          <p:cNvPr id="23" name="TextBox 22"/>
+          <p:cNvPr id="24" name="TextBox 23"/>
           <p:cNvSpPr txBox="1"/>
           <p:nvPr/>
         </p:nvSpPr>
         <p:spPr>
           <a:xfrm>
-            <a:off x="2194560" y="34472880"/>
-            <a:ext cx="7863840" cy="4754880"/>
+            <a:off x="2194560" y="31729680"/>
+            <a:ext cx="7863840" cy="7498080"/>
           </a:xfrm>
           <a:prstGeom prst="rect">
             <a:avLst/>
@@ -4028,13 +4052,13 @@
       </p:sp>
       <p:sp>
         <p:nvSpPr>
-          <p:cNvPr id="24" name="Rectangle 23"/>
+          <p:cNvPr id="25" name="Rectangle 24"/>
           <p:cNvSpPr/>
           <p:nvPr/>
         </p:nvSpPr>
         <p:spPr>
           <a:xfrm>
-            <a:off x="11795760" y="9875520"/>
+            <a:off x="11795760" y="7132320"/>
             <a:ext cx="9326880" cy="15544800"/>
           </a:xfrm>
           <a:prstGeom prst="rect">
@@ -4073,13 +4097,13 @@
       </p:sp>
       <p:sp>
         <p:nvSpPr>
-          <p:cNvPr id="25" name="Rectangle 24"/>
+          <p:cNvPr id="26" name="Rectangle 25"/>
           <p:cNvSpPr/>
           <p:nvPr/>
         </p:nvSpPr>
         <p:spPr>
           <a:xfrm>
-            <a:off x="11795760" y="9875520"/>
+            <a:off x="11795760" y="7132320"/>
             <a:ext cx="9326880" cy="146304"/>
           </a:xfrm>
           <a:prstGeom prst="rect">
@@ -4124,13 +4148,13 @@
       </p:sp>
       <p:sp>
         <p:nvSpPr>
-          <p:cNvPr id="26" name="Rectangle 25"/>
+          <p:cNvPr id="27" name="Rectangle 26"/>
           <p:cNvSpPr/>
           <p:nvPr/>
         </p:nvSpPr>
         <p:spPr>
           <a:xfrm>
-            <a:off x="12527280" y="10698480"/>
+            <a:off x="12527280" y="7955280"/>
             <a:ext cx="7863840" cy="12893040"/>
           </a:xfrm>
           <a:prstGeom prst="rect">
@@ -4169,13 +4193,13 @@
       </p:sp>
       <p:sp>
         <p:nvSpPr>
-          <p:cNvPr id="27" name="TextBox 26"/>
+          <p:cNvPr id="28" name="TextBox 27"/>
           <p:cNvSpPr txBox="1"/>
           <p:nvPr/>
         </p:nvSpPr>
         <p:spPr>
           <a:xfrm>
-            <a:off x="12527280" y="17190720"/>
+            <a:off x="12527280" y="14447520"/>
             <a:ext cx="7863840" cy="822960"/>
           </a:xfrm>
           <a:prstGeom prst="rect">
@@ -4208,13 +4232,13 @@
       </p:sp>
       <p:sp>
         <p:nvSpPr>
-          <p:cNvPr id="28" name="TextBox 27"/>
+          <p:cNvPr id="29" name="TextBox 28"/>
           <p:cNvSpPr txBox="1"/>
           <p:nvPr/>
         </p:nvSpPr>
         <p:spPr>
           <a:xfrm>
-            <a:off x="12527280" y="23957280"/>
+            <a:off x="12527280" y="21214080"/>
             <a:ext cx="7863840" cy="1005840"/>
           </a:xfrm>
           <a:prstGeom prst="rect">
@@ -4247,14 +4271,14 @@
       </p:sp>
       <p:sp>
         <p:nvSpPr>
-          <p:cNvPr id="29" name="Rectangle 28"/>
+          <p:cNvPr id="30" name="Rectangle 29"/>
           <p:cNvSpPr/>
           <p:nvPr/>
         </p:nvSpPr>
         <p:spPr>
           <a:xfrm>
-            <a:off x="11795760" y="26151840"/>
-            <a:ext cx="9326880" cy="13716000"/>
+            <a:off x="11795760" y="23408640"/>
+            <a:ext cx="9326880" cy="16459200"/>
           </a:xfrm>
           <a:prstGeom prst="rect">
             <a:avLst/>
@@ -4292,13 +4316,13 @@
       </p:sp>
       <p:sp>
         <p:nvSpPr>
-          <p:cNvPr id="30" name="Rectangle 29"/>
+          <p:cNvPr id="31" name="Rectangle 30"/>
           <p:cNvSpPr/>
           <p:nvPr/>
         </p:nvSpPr>
         <p:spPr>
           <a:xfrm>
-            <a:off x="11795760" y="26151840"/>
+            <a:off x="11795760" y="23408640"/>
             <a:ext cx="9326880" cy="146304"/>
           </a:xfrm>
           <a:prstGeom prst="rect">
@@ -4343,14 +4367,14 @@
       </p:sp>
       <p:sp>
         <p:nvSpPr>
-          <p:cNvPr id="31" name="Rectangle 30"/>
+          <p:cNvPr id="32" name="Rectangle 31"/>
           <p:cNvSpPr/>
           <p:nvPr/>
         </p:nvSpPr>
         <p:spPr>
           <a:xfrm>
-            <a:off x="12527280" y="26974800"/>
-            <a:ext cx="7863840" cy="11064240"/>
+            <a:off x="12527280" y="24231600"/>
+            <a:ext cx="7863840" cy="13807440"/>
           </a:xfrm>
           <a:prstGeom prst="rect">
             <a:avLst/>
@@ -4388,13 +4412,13 @@
       </p:sp>
       <p:sp>
         <p:nvSpPr>
-          <p:cNvPr id="32" name="TextBox 31"/>
+          <p:cNvPr id="33" name="TextBox 32"/>
           <p:cNvSpPr txBox="1"/>
           <p:nvPr/>
         </p:nvSpPr>
         <p:spPr>
           <a:xfrm>
-            <a:off x="12527280" y="32552640"/>
+            <a:off x="12527280" y="31181040"/>
             <a:ext cx="7863840" cy="822960"/>
           </a:xfrm>
           <a:prstGeom prst="rect">
@@ -4427,7 +4451,7 @@
       </p:sp>
       <p:sp>
         <p:nvSpPr>
-          <p:cNvPr id="33" name="TextBox 32"/>
+          <p:cNvPr id="34" name="TextBox 33"/>
           <p:cNvSpPr txBox="1"/>
           <p:nvPr/>
         </p:nvSpPr>
@@ -4466,13 +4490,13 @@
       </p:sp>
       <p:sp>
         <p:nvSpPr>
-          <p:cNvPr id="34" name="Rectangle 33"/>
+          <p:cNvPr id="35" name="Rectangle 34"/>
           <p:cNvSpPr/>
           <p:nvPr/>
         </p:nvSpPr>
         <p:spPr>
           <a:xfrm>
-            <a:off x="22128480" y="9875520"/>
+            <a:off x="22128480" y="7132320"/>
             <a:ext cx="9326880" cy="15544800"/>
           </a:xfrm>
           <a:prstGeom prst="rect">
@@ -4511,13 +4535,13 @@
       </p:sp>
       <p:sp>
         <p:nvSpPr>
-          <p:cNvPr id="35" name="Rectangle 34"/>
+          <p:cNvPr id="36" name="Rectangle 35"/>
           <p:cNvSpPr/>
           <p:nvPr/>
         </p:nvSpPr>
         <p:spPr>
           <a:xfrm>
-            <a:off x="22128480" y="9875520"/>
+            <a:off x="22128480" y="7132320"/>
             <a:ext cx="9326880" cy="146304"/>
           </a:xfrm>
           <a:prstGeom prst="rect">
@@ -4562,13 +4586,13 @@
       </p:sp>
       <p:sp>
         <p:nvSpPr>
-          <p:cNvPr id="36" name="TextBox 35"/>
+          <p:cNvPr id="37" name="TextBox 36"/>
           <p:cNvSpPr txBox="1"/>
           <p:nvPr/>
         </p:nvSpPr>
         <p:spPr>
           <a:xfrm>
-            <a:off x="22860000" y="10469880"/>
+            <a:off x="22860000" y="7726680"/>
             <a:ext cx="7863840" cy="914400"/>
           </a:xfrm>
           <a:prstGeom prst="rect">
@@ -4601,13 +4625,13 @@
       </p:sp>
       <p:sp>
         <p:nvSpPr>
-          <p:cNvPr id="37" name="Rectangle 36"/>
+          <p:cNvPr id="38" name="Rectangle 37"/>
           <p:cNvSpPr/>
           <p:nvPr/>
         </p:nvSpPr>
         <p:spPr>
           <a:xfrm>
-            <a:off x="22860000" y="11475720"/>
+            <a:off x="22860000" y="8732520"/>
             <a:ext cx="3108960" cy="118872"/>
           </a:xfrm>
           <a:prstGeom prst="rect">
@@ -4652,13 +4676,13 @@
       </p:sp>
       <p:sp>
         <p:nvSpPr>
-          <p:cNvPr id="38" name="TextBox 37"/>
+          <p:cNvPr id="39" name="TextBox 38"/>
           <p:cNvSpPr txBox="1"/>
           <p:nvPr/>
         </p:nvSpPr>
         <p:spPr>
           <a:xfrm>
-            <a:off x="22860000" y="11978640"/>
+            <a:off x="22860000" y="9235440"/>
             <a:ext cx="7863840" cy="12801600"/>
           </a:xfrm>
           <a:prstGeom prst="rect">
@@ -4692,14 +4716,14 @@
       </p:sp>
       <p:sp>
         <p:nvSpPr>
-          <p:cNvPr id="39" name="Rectangle 38"/>
+          <p:cNvPr id="40" name="Rectangle 39"/>
           <p:cNvSpPr/>
           <p:nvPr/>
         </p:nvSpPr>
         <p:spPr>
           <a:xfrm>
-            <a:off x="22128480" y="26151840"/>
-            <a:ext cx="9326880" cy="13716000"/>
+            <a:off x="22128480" y="23408640"/>
+            <a:ext cx="9326880" cy="16459200"/>
           </a:xfrm>
           <a:prstGeom prst="rect">
             <a:avLst/>
@@ -4737,13 +4761,13 @@
       </p:sp>
       <p:sp>
         <p:nvSpPr>
-          <p:cNvPr id="40" name="Rectangle 39"/>
+          <p:cNvPr id="41" name="Rectangle 40"/>
           <p:cNvSpPr/>
           <p:nvPr/>
         </p:nvSpPr>
         <p:spPr>
           <a:xfrm>
-            <a:off x="22128480" y="26151840"/>
+            <a:off x="22128480" y="23408640"/>
             <a:ext cx="9326880" cy="146304"/>
           </a:xfrm>
           <a:prstGeom prst="rect">
@@ -4788,13 +4812,13 @@
       </p:sp>
       <p:sp>
         <p:nvSpPr>
-          <p:cNvPr id="41" name="TextBox 40"/>
+          <p:cNvPr id="42" name="TextBox 41"/>
           <p:cNvSpPr txBox="1"/>
           <p:nvPr/>
         </p:nvSpPr>
         <p:spPr>
           <a:xfrm>
-            <a:off x="22860000" y="26746200"/>
+            <a:off x="22860000" y="24003000"/>
             <a:ext cx="7863840" cy="914400"/>
           </a:xfrm>
           <a:prstGeom prst="rect">
@@ -4827,13 +4851,13 @@
       </p:sp>
       <p:sp>
         <p:nvSpPr>
-          <p:cNvPr id="42" name="Rectangle 41"/>
+          <p:cNvPr id="43" name="Rectangle 42"/>
           <p:cNvSpPr/>
           <p:nvPr/>
         </p:nvSpPr>
         <p:spPr>
           <a:xfrm>
-            <a:off x="22860000" y="27752040"/>
+            <a:off x="22860000" y="25008840"/>
             <a:ext cx="3108960" cy="118872"/>
           </a:xfrm>
           <a:prstGeom prst="rect">
@@ -4878,13 +4902,13 @@
       </p:sp>
       <p:sp>
         <p:nvSpPr>
-          <p:cNvPr id="43" name="Oval 42"/>
+          <p:cNvPr id="44" name="Oval 43"/>
           <p:cNvSpPr/>
           <p:nvPr/>
         </p:nvSpPr>
         <p:spPr>
           <a:xfrm>
-            <a:off x="22860000" y="28510992"/>
+            <a:off x="22860000" y="25767792"/>
             <a:ext cx="274320" cy="274320"/>
           </a:xfrm>
           <a:prstGeom prst="ellipse">
@@ -4921,13 +4945,13 @@
       </p:sp>
       <p:sp>
         <p:nvSpPr>
-          <p:cNvPr id="44" name="TextBox 43"/>
+          <p:cNvPr id="45" name="TextBox 44"/>
           <p:cNvSpPr txBox="1"/>
           <p:nvPr/>
         </p:nvSpPr>
         <p:spPr>
           <a:xfrm>
-            <a:off x="23454360" y="28346400"/>
+            <a:off x="23454360" y="25603200"/>
             <a:ext cx="7223760" cy="1188720"/>
           </a:xfrm>
           <a:prstGeom prst="rect">
@@ -4960,13 +4984,13 @@
       </p:sp>
       <p:sp>
         <p:nvSpPr>
-          <p:cNvPr id="45" name="Oval 44"/>
+          <p:cNvPr id="46" name="Oval 45"/>
           <p:cNvSpPr/>
           <p:nvPr/>
         </p:nvSpPr>
         <p:spPr>
           <a:xfrm>
-            <a:off x="22860000" y="29974032"/>
+            <a:off x="22860000" y="27230832"/>
             <a:ext cx="274320" cy="274320"/>
           </a:xfrm>
           <a:prstGeom prst="ellipse">
@@ -5003,13 +5027,13 @@
       </p:sp>
       <p:sp>
         <p:nvSpPr>
-          <p:cNvPr id="46" name="TextBox 45"/>
+          <p:cNvPr id="47" name="TextBox 46"/>
           <p:cNvSpPr txBox="1"/>
           <p:nvPr/>
         </p:nvSpPr>
         <p:spPr>
           <a:xfrm>
-            <a:off x="23454360" y="29809440"/>
+            <a:off x="23454360" y="27066240"/>
             <a:ext cx="7223760" cy="1188720"/>
           </a:xfrm>
           <a:prstGeom prst="rect">
@@ -5042,13 +5066,13 @@
       </p:sp>
       <p:sp>
         <p:nvSpPr>
-          <p:cNvPr id="47" name="Oval 46"/>
+          <p:cNvPr id="48" name="Oval 47"/>
           <p:cNvSpPr/>
           <p:nvPr/>
         </p:nvSpPr>
         <p:spPr>
           <a:xfrm>
-            <a:off x="22860000" y="31437072"/>
+            <a:off x="22860000" y="28693872"/>
             <a:ext cx="274320" cy="274320"/>
           </a:xfrm>
           <a:prstGeom prst="ellipse">
@@ -5085,13 +5109,13 @@
       </p:sp>
       <p:sp>
         <p:nvSpPr>
-          <p:cNvPr id="48" name="TextBox 47"/>
+          <p:cNvPr id="49" name="TextBox 48"/>
           <p:cNvSpPr txBox="1"/>
           <p:nvPr/>
         </p:nvSpPr>
         <p:spPr>
           <a:xfrm>
-            <a:off x="23454360" y="31272480"/>
+            <a:off x="23454360" y="28529280"/>
             <a:ext cx="7223760" cy="1188720"/>
           </a:xfrm>
           <a:prstGeom prst="rect">
@@ -5124,13 +5148,13 @@
       </p:sp>
       <p:sp>
         <p:nvSpPr>
-          <p:cNvPr id="49" name="TextBox 48"/>
+          <p:cNvPr id="50" name="TextBox 49"/>
           <p:cNvSpPr txBox="1"/>
           <p:nvPr/>
         </p:nvSpPr>
         <p:spPr>
           <a:xfrm>
-            <a:off x="22860000" y="33649920"/>
+            <a:off x="22860000" y="30906720"/>
             <a:ext cx="7863840" cy="2194560"/>
           </a:xfrm>
           <a:prstGeom prst="rect">
@@ -5163,7 +5187,7 @@
       </p:sp>
       <p:sp>
         <p:nvSpPr>
-          <p:cNvPr id="50" name="Rectangle 49"/>
+          <p:cNvPr id="51" name="Rectangle 50"/>
           <p:cNvSpPr/>
           <p:nvPr/>
         </p:nvSpPr>
@@ -5214,7 +5238,7 @@
       </p:sp>
       <p:sp>
         <p:nvSpPr>
-          <p:cNvPr id="51" name="TextBox 50"/>
+          <p:cNvPr id="52" name="TextBox 51"/>
           <p:cNvSpPr txBox="1"/>
           <p:nvPr/>
         </p:nvSpPr>
@@ -5253,7 +5277,7 @@
       </p:sp>
       <p:sp>
         <p:nvSpPr>
-          <p:cNvPr id="52" name="TextBox 51"/>
+          <p:cNvPr id="53" name="TextBox 52"/>
           <p:cNvSpPr txBox="1"/>
           <p:nvPr/>
         </p:nvSpPr>
@@ -5292,7 +5316,7 @@
       </p:sp>
       <p:sp>
         <p:nvSpPr>
-          <p:cNvPr id="53" name="TextBox 52"/>
+          <p:cNvPr id="54" name="TextBox 53"/>
           <p:cNvSpPr txBox="1"/>
           <p:nvPr/>
         </p:nvSpPr>

--- a/assets/templates/MS3L_poster_template.pptx
+++ b/assets/templates/MS3L_poster_template.pptx
@@ -3103,7 +3103,7 @@
             <a:avLst/>
           </a:prstGeom>
           <a:solidFill>
-            <a:srgbClr val="ECF3FB"/>
+            <a:srgbClr val="FFFFFF"/>
           </a:solidFill>
           <a:ln>
             <a:noFill/>
@@ -3131,60 +3131,9 @@
           </a:p>
         </p:txBody>
       </p:sp>
-      <p:sp>
-        <p:nvSpPr>
-          <p:cNvPr id="3" name="Rectangle 2"/>
-          <p:cNvSpPr/>
-          <p:nvPr/>
-        </p:nvSpPr>
-        <p:spPr>
-          <a:xfrm>
-            <a:off x="0" y="0"/>
-            <a:ext cx="32918400" cy="5852160"/>
-          </a:xfrm>
-          <a:prstGeom prst="rect">
-            <a:avLst/>
-          </a:prstGeom>
-          <a:gradFill rotWithShape="1">
-            <a:gsLst>
-              <a:gs pos="0">
-                <a:srgbClr val="0075C2"/>
-              </a:gs>
-              <a:gs pos="100000">
-                <a:srgbClr val="00ADA9"/>
-              </a:gs>
-            </a:gsLst>
-            <a:lin scaled="0" ang="2700000"/>
-          </a:gradFill>
-          <a:ln>
-            <a:noFill/>
-          </a:ln>
-        </p:spPr>
-        <p:style>
-          <a:lnRef idx="1">
-            <a:schemeClr val="accent1"/>
-          </a:lnRef>
-          <a:fillRef idx="3">
-            <a:schemeClr val="accent1"/>
-          </a:fillRef>
-          <a:effectRef idx="2">
-            <a:schemeClr val="accent1"/>
-          </a:effectRef>
-          <a:fontRef idx="minor">
-            <a:schemeClr val="lt1"/>
-          </a:fontRef>
-        </p:style>
-        <p:txBody>
-          <a:bodyPr rtlCol="0" anchor="ctr"/>
-          <a:lstStyle/>
-          <a:p>
-            <a:pPr algn="ctr"/>
-          </a:p>
-        </p:txBody>
-      </p:sp>
       <p:pic>
         <p:nvPicPr>
-          <p:cNvPr id="4" name="Picture 3" descr="ms3l-lockup-horizontal-white.png"/>
+          <p:cNvPr id="3" name="Picture 2" descr="ms3l-lockup-horizontal.png"/>
           <p:cNvPicPr>
             <a:picLocks noChangeAspect="1"/>
           </p:cNvPicPr>
@@ -3198,8 +3147,8 @@
         </p:blipFill>
         <p:spPr>
           <a:xfrm>
-            <a:off x="1463040" y="566928"/>
-            <a:ext cx="9692640" cy="1674183"/>
+            <a:off x="1463040" y="658368"/>
+            <a:ext cx="9326880" cy="1611007"/>
           </a:xfrm>
           <a:prstGeom prst="rect">
             <a:avLst/>
@@ -3208,7 +3157,7 @@
       </p:pic>
       <p:pic>
         <p:nvPicPr>
-          <p:cNvPr id="5" name="Picture 4" descr="ms3l-avatar-circle.png"/>
+          <p:cNvPr id="4" name="Picture 3" descr="krict-logo.png"/>
           <p:cNvPicPr>
             <a:picLocks noChangeAspect="1"/>
           </p:cNvPicPr>
@@ -3222,47 +3171,23 @@
         </p:blipFill>
         <p:spPr>
           <a:xfrm>
-            <a:off x="29535119" y="566928"/>
-            <a:ext cx="1920240" cy="1920240"/>
+            <a:off x="27432000" y="960120"/>
+            <a:ext cx="3840480" cy="1212952"/>
           </a:xfrm>
           <a:prstGeom prst="rect">
             <a:avLst/>
           </a:prstGeom>
         </p:spPr>
       </p:pic>
-      <p:pic>
-        <p:nvPicPr>
-          <p:cNvPr id="6" name="Picture 5" descr="krict-logo-white.png"/>
-          <p:cNvPicPr>
-            <a:picLocks noChangeAspect="1"/>
-          </p:cNvPicPr>
-          <p:nvPr/>
-        </p:nvPicPr>
-        <p:blipFill>
-          <a:blip r:embed="rId4"/>
-          <a:stretch>
-            <a:fillRect/>
-          </a:stretch>
-        </p:blipFill>
-        <p:spPr>
-          <a:xfrm>
-            <a:off x="25237440" y="960120"/>
-            <a:ext cx="3657600" cy="1155192"/>
-          </a:xfrm>
-          <a:prstGeom prst="rect">
-            <a:avLst/>
-          </a:prstGeom>
-        </p:spPr>
-      </p:pic>
-      <p:sp>
-        <p:nvSpPr>
-          <p:cNvPr id="7" name="TextBox 6"/>
+      <p:sp>
+        <p:nvSpPr>
+          <p:cNvPr id="5" name="TextBox 4"/>
           <p:cNvSpPr txBox="1"/>
           <p:nvPr/>
         </p:nvSpPr>
         <p:spPr>
           <a:xfrm>
-            <a:off x="1463040" y="2331720"/>
+            <a:off x="1463040" y="2395728"/>
             <a:ext cx="30175200" cy="1920240"/>
           </a:xfrm>
           <a:prstGeom prst="rect">
@@ -3284,9 +3209,9 @@
             <a:r>
               <a:rPr sz="6000" b="1">
                 <a:solidFill>
-                  <a:srgbClr val="FFFFFF"/>
+                  <a:srgbClr val="0B2F5B"/>
                 </a:solidFill>
-                <a:latin typeface="Noto Sans KR"/>
+                <a:latin typeface="Arial"/>
               </a:rPr>
               <a:t>Poster title goes here, one or two lines at most</a:t>
             </a:r>
@@ -3295,13 +3220,13 @@
       </p:sp>
       <p:sp>
         <p:nvSpPr>
-          <p:cNvPr id="8" name="TextBox 7"/>
+          <p:cNvPr id="6" name="TextBox 5"/>
           <p:cNvSpPr txBox="1"/>
           <p:nvPr/>
         </p:nvSpPr>
         <p:spPr>
           <a:xfrm>
-            <a:off x="1463040" y="4133087"/>
+            <a:off x="1463040" y="4187952"/>
             <a:ext cx="30175200" cy="731520"/>
           </a:xfrm>
           <a:prstGeom prst="rect">
@@ -3323,9 +3248,9 @@
             <a:r>
               <a:rPr sz="2800" b="1">
                 <a:solidFill>
-                  <a:srgbClr val="E2F4F7"/>
+                  <a:srgbClr val="0075C2"/>
                 </a:solidFill>
-                <a:latin typeface="Noto Sans KR"/>
+                <a:latin typeface="Arial"/>
               </a:rPr>
               <a:t>Jihoon Kim¹²*, Coauthor One¹, Coauthor Two²</a:t>
             </a:r>
@@ -3334,13 +3259,13 @@
       </p:sp>
       <p:sp>
         <p:nvSpPr>
-          <p:cNvPr id="9" name="TextBox 8"/>
+          <p:cNvPr id="7" name="TextBox 6"/>
           <p:cNvSpPr txBox="1"/>
           <p:nvPr/>
         </p:nvSpPr>
         <p:spPr>
           <a:xfrm>
-            <a:off x="1463040" y="4846320"/>
+            <a:off x="1463040" y="4864608"/>
             <a:ext cx="30175200" cy="1097280"/>
           </a:xfrm>
           <a:prstGeom prst="rect">
@@ -3362,9 +3287,9 @@
             <a:r>
               <a:rPr sz="2000" b="0">
                 <a:solidFill>
-                  <a:srgbClr val="BFE9EE"/>
+                  <a:srgbClr val="5B6F84"/>
                 </a:solidFill>
-                <a:latin typeface="Noto Sans KR"/>
+                <a:latin typeface="Arial"/>
               </a:rPr>
               <a:t>¹ Chemical Process Technology Division, Korea Research Institute of Chemical Technology (KRICT), Daejeon, Republic of Korea
 ² Advanced Materials and Chemical Engineering, University of Science and Technology (UST)    •    * jh.kim@krict.re.kr</a:t>
@@ -3374,59 +3299,14 @@
       </p:sp>
       <p:sp>
         <p:nvSpPr>
-          <p:cNvPr id="10" name="Rectangle 9"/>
+          <p:cNvPr id="8" name="Rectangle 7"/>
           <p:cNvSpPr/>
           <p:nvPr/>
         </p:nvSpPr>
         <p:spPr>
           <a:xfrm>
-            <a:off x="1463040" y="7132320"/>
-            <a:ext cx="9326880" cy="10515600"/>
-          </a:xfrm>
-          <a:prstGeom prst="rect">
-            <a:avLst/>
-          </a:prstGeom>
-          <a:solidFill>
-            <a:srgbClr val="FFFFFF"/>
-          </a:solidFill>
-          <a:ln w="12700">
-            <a:solidFill>
-              <a:srgbClr val="D6E2EE"/>
-            </a:solidFill>
-          </a:ln>
-        </p:spPr>
-        <p:style>
-          <a:lnRef idx="1">
-            <a:schemeClr val="accent1"/>
-          </a:lnRef>
-          <a:fillRef idx="3">
-            <a:schemeClr val="accent1"/>
-          </a:fillRef>
-          <a:effectRef idx="2">
-            <a:schemeClr val="accent1"/>
-          </a:effectRef>
-          <a:fontRef idx="minor">
-            <a:schemeClr val="lt1"/>
-          </a:fontRef>
-        </p:style>
-        <p:txBody>
-          <a:bodyPr rtlCol="0" anchor="ctr"/>
-          <a:lstStyle/>
-          <a:p>
-            <a:pPr algn="ctr"/>
-          </a:p>
-        </p:txBody>
-      </p:sp>
-      <p:sp>
-        <p:nvSpPr>
-          <p:cNvPr id="11" name="Rectangle 10"/>
-          <p:cNvSpPr/>
-          <p:nvPr/>
-        </p:nvSpPr>
-        <p:spPr>
-          <a:xfrm>
-            <a:off x="1463040" y="7132320"/>
-            <a:ext cx="9326880" cy="146304"/>
+            <a:off x="0" y="5852160"/>
+            <a:ext cx="32918400" cy="109728"/>
           </a:xfrm>
           <a:prstGeom prst="rect">
             <a:avLst/>
@@ -3470,53 +3350,59 @@
       </p:sp>
       <p:sp>
         <p:nvSpPr>
-          <p:cNvPr id="12" name="TextBox 11"/>
-          <p:cNvSpPr txBox="1"/>
+          <p:cNvPr id="9" name="Rectangle 8"/>
+          <p:cNvSpPr/>
           <p:nvPr/>
         </p:nvSpPr>
         <p:spPr>
           <a:xfrm>
-            <a:off x="2194560" y="7726680"/>
-            <a:ext cx="7863840" cy="914400"/>
+            <a:off x="1463040" y="7040880"/>
+            <a:ext cx="9326880" cy="10515600"/>
           </a:xfrm>
           <a:prstGeom prst="rect">
             <a:avLst/>
           </a:prstGeom>
-          <a:noFill/>
-        </p:spPr>
-        <p:txBody>
-          <a:bodyPr wrap="square" lIns="0" rIns="0" tIns="0" bIns="0">
-            <a:spAutoFit/>
-          </a:bodyPr>
-          <a:lstStyle/>
-          <a:p>
-            <a:pPr algn="l">
-              <a:lnSpc>
-                <a:spcPct val="100000"/>
-              </a:lnSpc>
-            </a:pPr>
-            <a:r>
-              <a:rPr sz="4000" b="1">
-                <a:solidFill>
-                  <a:srgbClr val="0B2F5B"/>
-                </a:solidFill>
-                <a:latin typeface="Noto Sans KR"/>
-              </a:rPr>
-              <a:t>1. Introduction</a:t>
-            </a:r>
-          </a:p>
-        </p:txBody>
-      </p:sp>
-      <p:sp>
-        <p:nvSpPr>
-          <p:cNvPr id="13" name="Rectangle 12"/>
+          <a:solidFill>
+            <a:srgbClr val="FFFFFF"/>
+          </a:solidFill>
+          <a:ln w="12700">
+            <a:solidFill>
+              <a:srgbClr val="D6E2EE"/>
+            </a:solidFill>
+          </a:ln>
+        </p:spPr>
+        <p:style>
+          <a:lnRef idx="1">
+            <a:schemeClr val="accent1"/>
+          </a:lnRef>
+          <a:fillRef idx="3">
+            <a:schemeClr val="accent1"/>
+          </a:fillRef>
+          <a:effectRef idx="2">
+            <a:schemeClr val="accent1"/>
+          </a:effectRef>
+          <a:fontRef idx="minor">
+            <a:schemeClr val="lt1"/>
+          </a:fontRef>
+        </p:style>
+        <p:txBody>
+          <a:bodyPr rtlCol="0" anchor="ctr"/>
+          <a:lstStyle/>
+          <a:p>
+            <a:pPr algn="ctr"/>
+          </a:p>
+        </p:txBody>
+      </p:sp>
+      <p:sp>
+        <p:nvSpPr>
+          <p:cNvPr id="10" name="Rectangle 9"/>
           <p:cNvSpPr/>
           <p:nvPr/>
         </p:nvSpPr>
         <p:spPr>
           <a:xfrm>
-            <a:off x="2194560" y="8732520"/>
-            <a:ext cx="3108960" cy="118872"/>
+            <a:off x="1463040" y="7040880"/>
+            <a:ext cx="9326880" cy="128016"/>
           </a:xfrm>
           <a:prstGeom prst="rect">
             <a:avLst/>
@@ -3560,14 +3446,14 @@
       </p:sp>
       <p:sp>
         <p:nvSpPr>
-          <p:cNvPr id="14" name="TextBox 13"/>
+          <p:cNvPr id="11" name="TextBox 10"/>
           <p:cNvSpPr txBox="1"/>
           <p:nvPr/>
         </p:nvSpPr>
         <p:spPr>
           <a:xfrm>
-            <a:off x="2194560" y="9235440"/>
-            <a:ext cx="7863840" cy="7772400"/>
+            <a:off x="2194560" y="7607808"/>
+            <a:ext cx="7863840" cy="914400"/>
           </a:xfrm>
           <a:prstGeom prst="rect">
             <a:avLst/>
@@ -3582,77 +3468,31 @@
           <a:p>
             <a:pPr algn="l">
               <a:lnSpc>
-                <a:spcPct val="145000"/>
+                <a:spcPct val="100000"/>
               </a:lnSpc>
             </a:pPr>
             <a:r>
-              <a:rPr sz="2600" b="0">
+              <a:rPr sz="4000" b="1">
                 <a:solidFill>
-                  <a:srgbClr val="5B6F84"/>
+                  <a:srgbClr val="0B2F5B"/>
                 </a:solidFill>
-                <a:latin typeface="Noto Sans KR"/>
+                <a:latin typeface="Arial"/>
               </a:rPr>
-              <a:t>Replace with your text. Body copy at this size stays readable from about 1.5 m, which is where people stand at a poster board.
-Keep each section to a few short paragraphs and let the figures carry the argument.</a:t>
-            </a:r>
-          </a:p>
-        </p:txBody>
-      </p:sp>
-      <p:sp>
-        <p:nvSpPr>
-          <p:cNvPr id="15" name="Rectangle 14"/>
+              <a:t>1. Introduction</a:t>
+            </a:r>
+          </a:p>
+        </p:txBody>
+      </p:sp>
+      <p:sp>
+        <p:nvSpPr>
+          <p:cNvPr id="12" name="Rectangle 11"/>
           <p:cNvSpPr/>
           <p:nvPr/>
         </p:nvSpPr>
         <p:spPr>
           <a:xfrm>
-            <a:off x="1463040" y="18379440"/>
-            <a:ext cx="9326880" cy="10515600"/>
-          </a:xfrm>
-          <a:prstGeom prst="rect">
-            <a:avLst/>
-          </a:prstGeom>
-          <a:solidFill>
-            <a:srgbClr val="FFFFFF"/>
-          </a:solidFill>
-          <a:ln w="12700">
-            <a:solidFill>
-              <a:srgbClr val="D6E2EE"/>
-            </a:solidFill>
-          </a:ln>
-        </p:spPr>
-        <p:style>
-          <a:lnRef idx="1">
-            <a:schemeClr val="accent1"/>
-          </a:lnRef>
-          <a:fillRef idx="3">
-            <a:schemeClr val="accent1"/>
-          </a:fillRef>
-          <a:effectRef idx="2">
-            <a:schemeClr val="accent1"/>
-          </a:effectRef>
-          <a:fontRef idx="minor">
-            <a:schemeClr val="lt1"/>
-          </a:fontRef>
-        </p:style>
-        <p:txBody>
-          <a:bodyPr rtlCol="0" anchor="ctr"/>
-          <a:lstStyle/>
-          <a:p>
-            <a:pPr algn="ctr"/>
-          </a:p>
-        </p:txBody>
-      </p:sp>
-      <p:sp>
-        <p:nvSpPr>
-          <p:cNvPr id="16" name="Rectangle 15"/>
-          <p:cNvSpPr/>
-          <p:nvPr/>
-        </p:nvSpPr>
-        <p:spPr>
-          <a:xfrm>
-            <a:off x="1463040" y="18379440"/>
-            <a:ext cx="9326880" cy="146304"/>
+            <a:off x="2194560" y="8613648"/>
+            <a:ext cx="3108960" cy="100584"/>
           </a:xfrm>
           <a:prstGeom prst="rect">
             <a:avLst/>
@@ -3696,14 +3536,14 @@
       </p:sp>
       <p:sp>
         <p:nvSpPr>
-          <p:cNvPr id="17" name="TextBox 16"/>
+          <p:cNvPr id="13" name="TextBox 12"/>
           <p:cNvSpPr txBox="1"/>
           <p:nvPr/>
         </p:nvSpPr>
         <p:spPr>
           <a:xfrm>
-            <a:off x="2194560" y="18973800"/>
-            <a:ext cx="7863840" cy="914400"/>
+            <a:off x="2194560" y="9107423"/>
+            <a:ext cx="7863840" cy="7772400"/>
           </a:xfrm>
           <a:prstGeom prst="rect">
             <a:avLst/>
@@ -3718,31 +3558,77 @@
           <a:p>
             <a:pPr algn="l">
               <a:lnSpc>
-                <a:spcPct val="100000"/>
+                <a:spcPct val="145000"/>
               </a:lnSpc>
             </a:pPr>
             <a:r>
-              <a:rPr sz="4000" b="1">
+              <a:rPr sz="2600" b="0">
                 <a:solidFill>
-                  <a:srgbClr val="0B2F5B"/>
+                  <a:srgbClr val="5B6F84"/>
                 </a:solidFill>
-                <a:latin typeface="Noto Sans KR"/>
+                <a:latin typeface="Arial"/>
               </a:rPr>
-              <a:t>2. Materials and methods</a:t>
-            </a:r>
-          </a:p>
-        </p:txBody>
-      </p:sp>
-      <p:sp>
-        <p:nvSpPr>
-          <p:cNvPr id="18" name="Rectangle 17"/>
+              <a:t>Replace with your text. Body copy at this size stays readable from about 1.5 m, which is where people stand at a poster board.
+Keep each section to a few short paragraphs and let the figures carry the argument.</a:t>
+            </a:r>
+          </a:p>
+        </p:txBody>
+      </p:sp>
+      <p:sp>
+        <p:nvSpPr>
+          <p:cNvPr id="14" name="Rectangle 13"/>
           <p:cNvSpPr/>
           <p:nvPr/>
         </p:nvSpPr>
         <p:spPr>
           <a:xfrm>
-            <a:off x="2194560" y="19979640"/>
-            <a:ext cx="3108960" cy="118872"/>
+            <a:off x="1463040" y="18288000"/>
+            <a:ext cx="9326880" cy="10515600"/>
+          </a:xfrm>
+          <a:prstGeom prst="rect">
+            <a:avLst/>
+          </a:prstGeom>
+          <a:solidFill>
+            <a:srgbClr val="FFFFFF"/>
+          </a:solidFill>
+          <a:ln w="12700">
+            <a:solidFill>
+              <a:srgbClr val="D6E2EE"/>
+            </a:solidFill>
+          </a:ln>
+        </p:spPr>
+        <p:style>
+          <a:lnRef idx="1">
+            <a:schemeClr val="accent1"/>
+          </a:lnRef>
+          <a:fillRef idx="3">
+            <a:schemeClr val="accent1"/>
+          </a:fillRef>
+          <a:effectRef idx="2">
+            <a:schemeClr val="accent1"/>
+          </a:effectRef>
+          <a:fontRef idx="minor">
+            <a:schemeClr val="lt1"/>
+          </a:fontRef>
+        </p:style>
+        <p:txBody>
+          <a:bodyPr rtlCol="0" anchor="ctr"/>
+          <a:lstStyle/>
+          <a:p>
+            <a:pPr algn="ctr"/>
+          </a:p>
+        </p:txBody>
+      </p:sp>
+      <p:sp>
+        <p:nvSpPr>
+          <p:cNvPr id="15" name="Rectangle 14"/>
+          <p:cNvSpPr/>
+          <p:nvPr/>
+        </p:nvSpPr>
+        <p:spPr>
+          <a:xfrm>
+            <a:off x="1463040" y="18288000"/>
+            <a:ext cx="9326880" cy="128016"/>
           </a:xfrm>
           <a:prstGeom prst="rect">
             <a:avLst/>
@@ -3786,14 +3672,14 @@
       </p:sp>
       <p:sp>
         <p:nvSpPr>
-          <p:cNvPr id="19" name="TextBox 18"/>
+          <p:cNvPr id="16" name="TextBox 15"/>
           <p:cNvSpPr txBox="1"/>
           <p:nvPr/>
         </p:nvSpPr>
         <p:spPr>
           <a:xfrm>
-            <a:off x="2194560" y="20482560"/>
-            <a:ext cx="7863840" cy="7772400"/>
+            <a:off x="2194560" y="18854928"/>
+            <a:ext cx="7863840" cy="914400"/>
           </a:xfrm>
           <a:prstGeom prst="rect">
             <a:avLst/>
@@ -3808,77 +3694,31 @@
           <a:p>
             <a:pPr algn="l">
               <a:lnSpc>
-                <a:spcPct val="145000"/>
+                <a:spcPct val="100000"/>
               </a:lnSpc>
             </a:pPr>
             <a:r>
-              <a:rPr sz="2600" b="0">
+              <a:rPr sz="4000" b="1">
                 <a:solidFill>
-                  <a:srgbClr val="5B6F84"/>
+                  <a:srgbClr val="0B2F5B"/>
                 </a:solidFill>
-                <a:latin typeface="Noto Sans KR"/>
+                <a:latin typeface="Arial"/>
               </a:rPr>
-              <a:t>Replace with your text. Body copy at this size stays readable from about 1.5 m, which is where people stand at a poster board.
-Keep each section to a few short paragraphs and let the figures carry the argument.</a:t>
-            </a:r>
-          </a:p>
-        </p:txBody>
-      </p:sp>
-      <p:sp>
-        <p:nvSpPr>
-          <p:cNvPr id="20" name="Rectangle 19"/>
+              <a:t>2. Materials and methods</a:t>
+            </a:r>
+          </a:p>
+        </p:txBody>
+      </p:sp>
+      <p:sp>
+        <p:nvSpPr>
+          <p:cNvPr id="17" name="Rectangle 16"/>
           <p:cNvSpPr/>
           <p:nvPr/>
         </p:nvSpPr>
         <p:spPr>
           <a:xfrm>
-            <a:off x="1463040" y="29626560"/>
-            <a:ext cx="9326880" cy="10241280"/>
-          </a:xfrm>
-          <a:prstGeom prst="rect">
-            <a:avLst/>
-          </a:prstGeom>
-          <a:solidFill>
-            <a:srgbClr val="FFFFFF"/>
-          </a:solidFill>
-          <a:ln w="12700">
-            <a:solidFill>
-              <a:srgbClr val="D6E2EE"/>
-            </a:solidFill>
-          </a:ln>
-        </p:spPr>
-        <p:style>
-          <a:lnRef idx="1">
-            <a:schemeClr val="accent1"/>
-          </a:lnRef>
-          <a:fillRef idx="3">
-            <a:schemeClr val="accent1"/>
-          </a:fillRef>
-          <a:effectRef idx="2">
-            <a:schemeClr val="accent1"/>
-          </a:effectRef>
-          <a:fontRef idx="minor">
-            <a:schemeClr val="lt1"/>
-          </a:fontRef>
-        </p:style>
-        <p:txBody>
-          <a:bodyPr rtlCol="0" anchor="ctr"/>
-          <a:lstStyle/>
-          <a:p>
-            <a:pPr algn="ctr"/>
-          </a:p>
-        </p:txBody>
-      </p:sp>
-      <p:sp>
-        <p:nvSpPr>
-          <p:cNvPr id="21" name="Rectangle 20"/>
-          <p:cNvSpPr/>
-          <p:nvPr/>
-        </p:nvSpPr>
-        <p:spPr>
-          <a:xfrm>
-            <a:off x="1463040" y="29626560"/>
-            <a:ext cx="9326880" cy="146304"/>
+            <a:off x="2194560" y="19860768"/>
+            <a:ext cx="3108960" cy="100584"/>
           </a:xfrm>
           <a:prstGeom prst="rect">
             <a:avLst/>
@@ -3922,14 +3762,14 @@
       </p:sp>
       <p:sp>
         <p:nvSpPr>
-          <p:cNvPr id="22" name="TextBox 21"/>
+          <p:cNvPr id="18" name="TextBox 17"/>
           <p:cNvSpPr txBox="1"/>
           <p:nvPr/>
         </p:nvSpPr>
         <p:spPr>
           <a:xfrm>
-            <a:off x="2194560" y="30220920"/>
-            <a:ext cx="7863840" cy="914400"/>
+            <a:off x="2194560" y="20354543"/>
+            <a:ext cx="7863840" cy="7772400"/>
           </a:xfrm>
           <a:prstGeom prst="rect">
             <a:avLst/>
@@ -3944,31 +3784,77 @@
           <a:p>
             <a:pPr algn="l">
               <a:lnSpc>
-                <a:spcPct val="100000"/>
+                <a:spcPct val="145000"/>
               </a:lnSpc>
             </a:pPr>
             <a:r>
-              <a:rPr sz="4000" b="1">
+              <a:rPr sz="2600" b="0">
                 <a:solidFill>
-                  <a:srgbClr val="0B2F5B"/>
+                  <a:srgbClr val="5B6F84"/>
                 </a:solidFill>
-                <a:latin typeface="Noto Sans KR"/>
+                <a:latin typeface="Arial"/>
               </a:rPr>
-              <a:t>3. Experimental setup</a:t>
-            </a:r>
-          </a:p>
-        </p:txBody>
-      </p:sp>
-      <p:sp>
-        <p:nvSpPr>
-          <p:cNvPr id="23" name="Rectangle 22"/>
+              <a:t>Replace with your text. Body copy at this size stays readable from about 1.5 m, which is where people stand at a poster board.
+Keep each section to a few short paragraphs and let the figures carry the argument.</a:t>
+            </a:r>
+          </a:p>
+        </p:txBody>
+      </p:sp>
+      <p:sp>
+        <p:nvSpPr>
+          <p:cNvPr id="19" name="Rectangle 18"/>
           <p:cNvSpPr/>
           <p:nvPr/>
         </p:nvSpPr>
         <p:spPr>
           <a:xfrm>
-            <a:off x="2194560" y="31226760"/>
-            <a:ext cx="3108960" cy="118872"/>
+            <a:off x="1463040" y="29535120"/>
+            <a:ext cx="9326880" cy="10881360"/>
+          </a:xfrm>
+          <a:prstGeom prst="rect">
+            <a:avLst/>
+          </a:prstGeom>
+          <a:solidFill>
+            <a:srgbClr val="FFFFFF"/>
+          </a:solidFill>
+          <a:ln w="12700">
+            <a:solidFill>
+              <a:srgbClr val="D6E2EE"/>
+            </a:solidFill>
+          </a:ln>
+        </p:spPr>
+        <p:style>
+          <a:lnRef idx="1">
+            <a:schemeClr val="accent1"/>
+          </a:lnRef>
+          <a:fillRef idx="3">
+            <a:schemeClr val="accent1"/>
+          </a:fillRef>
+          <a:effectRef idx="2">
+            <a:schemeClr val="accent1"/>
+          </a:effectRef>
+          <a:fontRef idx="minor">
+            <a:schemeClr val="lt1"/>
+          </a:fontRef>
+        </p:style>
+        <p:txBody>
+          <a:bodyPr rtlCol="0" anchor="ctr"/>
+          <a:lstStyle/>
+          <a:p>
+            <a:pPr algn="ctr"/>
+          </a:p>
+        </p:txBody>
+      </p:sp>
+      <p:sp>
+        <p:nvSpPr>
+          <p:cNvPr id="20" name="Rectangle 19"/>
+          <p:cNvSpPr/>
+          <p:nvPr/>
+        </p:nvSpPr>
+        <p:spPr>
+          <a:xfrm>
+            <a:off x="1463040" y="29535120"/>
+            <a:ext cx="9326880" cy="128016"/>
           </a:xfrm>
           <a:prstGeom prst="rect">
             <a:avLst/>
@@ -4012,14 +3898,14 @@
       </p:sp>
       <p:sp>
         <p:nvSpPr>
-          <p:cNvPr id="24" name="TextBox 23"/>
+          <p:cNvPr id="21" name="TextBox 20"/>
           <p:cNvSpPr txBox="1"/>
           <p:nvPr/>
         </p:nvSpPr>
         <p:spPr>
           <a:xfrm>
-            <a:off x="2194560" y="31729680"/>
-            <a:ext cx="7863840" cy="7498080"/>
+            <a:off x="2194560" y="30102048"/>
+            <a:ext cx="7863840" cy="914400"/>
           </a:xfrm>
           <a:prstGeom prst="rect">
             <a:avLst/>
@@ -4034,77 +3920,31 @@
           <a:p>
             <a:pPr algn="l">
               <a:lnSpc>
-                <a:spcPct val="145000"/>
+                <a:spcPct val="100000"/>
               </a:lnSpc>
             </a:pPr>
             <a:r>
-              <a:rPr sz="2600" b="0">
+              <a:rPr sz="4000" b="1">
                 <a:solidFill>
-                  <a:srgbClr val="5B6F84"/>
+                  <a:srgbClr val="0B2F5B"/>
                 </a:solidFill>
-                <a:latin typeface="Noto Sans KR"/>
+                <a:latin typeface="Arial"/>
               </a:rPr>
-              <a:t>Replace with your text. Body copy at this size stays readable from about 1.5 m, which is where people stand at a poster board.
-Keep each section to a few short paragraphs and let the figures carry the argument.</a:t>
-            </a:r>
-          </a:p>
-        </p:txBody>
-      </p:sp>
-      <p:sp>
-        <p:nvSpPr>
-          <p:cNvPr id="25" name="Rectangle 24"/>
+              <a:t>3. Experimental setup</a:t>
+            </a:r>
+          </a:p>
+        </p:txBody>
+      </p:sp>
+      <p:sp>
+        <p:nvSpPr>
+          <p:cNvPr id="22" name="Rectangle 21"/>
           <p:cNvSpPr/>
           <p:nvPr/>
         </p:nvSpPr>
         <p:spPr>
           <a:xfrm>
-            <a:off x="11795760" y="7132320"/>
-            <a:ext cx="9326880" cy="15544800"/>
-          </a:xfrm>
-          <a:prstGeom prst="rect">
-            <a:avLst/>
-          </a:prstGeom>
-          <a:solidFill>
-            <a:srgbClr val="FFFFFF"/>
-          </a:solidFill>
-          <a:ln w="12700">
-            <a:solidFill>
-              <a:srgbClr val="D6E2EE"/>
-            </a:solidFill>
-          </a:ln>
-        </p:spPr>
-        <p:style>
-          <a:lnRef idx="1">
-            <a:schemeClr val="accent1"/>
-          </a:lnRef>
-          <a:fillRef idx="3">
-            <a:schemeClr val="accent1"/>
-          </a:fillRef>
-          <a:effectRef idx="2">
-            <a:schemeClr val="accent1"/>
-          </a:effectRef>
-          <a:fontRef idx="minor">
-            <a:schemeClr val="lt1"/>
-          </a:fontRef>
-        </p:style>
-        <p:txBody>
-          <a:bodyPr rtlCol="0" anchor="ctr"/>
-          <a:lstStyle/>
-          <a:p>
-            <a:pPr algn="ctr"/>
-          </a:p>
-        </p:txBody>
-      </p:sp>
-      <p:sp>
-        <p:nvSpPr>
-          <p:cNvPr id="26" name="Rectangle 25"/>
-          <p:cNvSpPr/>
-          <p:nvPr/>
-        </p:nvSpPr>
-        <p:spPr>
-          <a:xfrm>
-            <a:off x="11795760" y="7132320"/>
-            <a:ext cx="9326880" cy="146304"/>
+            <a:off x="2194560" y="31107888"/>
+            <a:ext cx="3108960" cy="100584"/>
           </a:xfrm>
           <a:prstGeom prst="rect">
             <a:avLst/>
@@ -4148,59 +3988,14 @@
       </p:sp>
       <p:sp>
         <p:nvSpPr>
-          <p:cNvPr id="27" name="Rectangle 26"/>
-          <p:cNvSpPr/>
-          <p:nvPr/>
-        </p:nvSpPr>
-        <p:spPr>
-          <a:xfrm>
-            <a:off x="12527280" y="7955280"/>
-            <a:ext cx="7863840" cy="12893040"/>
-          </a:xfrm>
-          <a:prstGeom prst="rect">
-            <a:avLst/>
-          </a:prstGeom>
-          <a:solidFill>
-            <a:srgbClr val="F4F8FD"/>
-          </a:solidFill>
-          <a:ln w="12700">
-            <a:solidFill>
-              <a:srgbClr val="D6E2EE"/>
-            </a:solidFill>
-          </a:ln>
-        </p:spPr>
-        <p:style>
-          <a:lnRef idx="1">
-            <a:schemeClr val="accent1"/>
-          </a:lnRef>
-          <a:fillRef idx="3">
-            <a:schemeClr val="accent1"/>
-          </a:fillRef>
-          <a:effectRef idx="2">
-            <a:schemeClr val="accent1"/>
-          </a:effectRef>
-          <a:fontRef idx="minor">
-            <a:schemeClr val="lt1"/>
-          </a:fontRef>
-        </p:style>
-        <p:txBody>
-          <a:bodyPr rtlCol="0" anchor="ctr"/>
-          <a:lstStyle/>
-          <a:p>
-            <a:pPr algn="ctr"/>
-          </a:p>
-        </p:txBody>
-      </p:sp>
-      <p:sp>
-        <p:nvSpPr>
-          <p:cNvPr id="28" name="TextBox 27"/>
+          <p:cNvPr id="23" name="TextBox 22"/>
           <p:cNvSpPr txBox="1"/>
           <p:nvPr/>
         </p:nvSpPr>
         <p:spPr>
           <a:xfrm>
-            <a:off x="12527280" y="14447520"/>
-            <a:ext cx="7863840" cy="822960"/>
+            <a:off x="2194560" y="31601663"/>
+            <a:ext cx="7863840" cy="8138160"/>
           </a:xfrm>
           <a:prstGeom prst="rect">
             <a:avLst/>
@@ -4213,72 +4008,34 @@
           </a:bodyPr>
           <a:lstStyle/>
           <a:p>
-            <a:pPr algn="ctr">
+            <a:pPr algn="l">
               <a:lnSpc>
-                <a:spcPct val="100000"/>
+                <a:spcPct val="145000"/>
               </a:lnSpc>
             </a:pPr>
             <a:r>
-              <a:rPr sz="3000" b="0">
-                <a:solidFill>
-                  <a:srgbClr val="9AAEC2"/>
-                </a:solidFill>
-                <a:latin typeface="Noto Sans KR"/>
-              </a:rPr>
-              <a:t>Place figure here</a:t>
-            </a:r>
-          </a:p>
-        </p:txBody>
-      </p:sp>
-      <p:sp>
-        <p:nvSpPr>
-          <p:cNvPr id="29" name="TextBox 28"/>
-          <p:cNvSpPr txBox="1"/>
-          <p:nvPr/>
-        </p:nvSpPr>
-        <p:spPr>
-          <a:xfrm>
-            <a:off x="12527280" y="21214080"/>
-            <a:ext cx="7863840" cy="1005840"/>
-          </a:xfrm>
-          <a:prstGeom prst="rect">
-            <a:avLst/>
-          </a:prstGeom>
-          <a:noFill/>
-        </p:spPr>
-        <p:txBody>
-          <a:bodyPr wrap="square" lIns="0" rIns="0" tIns="0" bIns="0">
-            <a:spAutoFit/>
-          </a:bodyPr>
-          <a:lstStyle/>
-          <a:p>
-            <a:pPr algn="l">
-              <a:lnSpc>
-                <a:spcPct val="135000"/>
-              </a:lnSpc>
-            </a:pPr>
-            <a:r>
-              <a:rPr sz="2400" b="0">
+              <a:rPr sz="2600" b="0">
                 <a:solidFill>
                   <a:srgbClr val="5B6F84"/>
                 </a:solidFill>
-                <a:latin typeface="Noto Sans KR"/>
+                <a:latin typeface="Arial"/>
               </a:rPr>
-              <a:t>Figure 1. Caption describing what the reader should take from this panel.</a:t>
-            </a:r>
-          </a:p>
-        </p:txBody>
-      </p:sp>
-      <p:sp>
-        <p:nvSpPr>
-          <p:cNvPr id="30" name="Rectangle 29"/>
+              <a:t>Replace with your text. Body copy at this size stays readable from about 1.5 m, which is where people stand at a poster board.
+Keep each section to a few short paragraphs and let the figures carry the argument.</a:t>
+            </a:r>
+          </a:p>
+        </p:txBody>
+      </p:sp>
+      <p:sp>
+        <p:nvSpPr>
+          <p:cNvPr id="24" name="Rectangle 23"/>
           <p:cNvSpPr/>
           <p:nvPr/>
         </p:nvSpPr>
         <p:spPr>
           <a:xfrm>
-            <a:off x="11795760" y="23408640"/>
-            <a:ext cx="9326880" cy="16459200"/>
+            <a:off x="11795760" y="7040880"/>
+            <a:ext cx="9326880" cy="15544800"/>
           </a:xfrm>
           <a:prstGeom prst="rect">
             <a:avLst/>
@@ -4316,14 +4073,14 @@
       </p:sp>
       <p:sp>
         <p:nvSpPr>
-          <p:cNvPr id="31" name="Rectangle 30"/>
+          <p:cNvPr id="25" name="Rectangle 24"/>
           <p:cNvSpPr/>
           <p:nvPr/>
         </p:nvSpPr>
         <p:spPr>
           <a:xfrm>
-            <a:off x="11795760" y="23408640"/>
-            <a:ext cx="9326880" cy="146304"/>
+            <a:off x="11795760" y="7040880"/>
+            <a:ext cx="9326880" cy="128016"/>
           </a:xfrm>
           <a:prstGeom prst="rect">
             <a:avLst/>
@@ -4367,14 +4124,14 @@
       </p:sp>
       <p:sp>
         <p:nvSpPr>
-          <p:cNvPr id="32" name="Rectangle 31"/>
+          <p:cNvPr id="26" name="Rectangle 25"/>
           <p:cNvSpPr/>
           <p:nvPr/>
         </p:nvSpPr>
         <p:spPr>
           <a:xfrm>
-            <a:off x="12527280" y="24231600"/>
-            <a:ext cx="7863840" cy="13807440"/>
+            <a:off x="12527280" y="7818120"/>
+            <a:ext cx="7863840" cy="12938760"/>
           </a:xfrm>
           <a:prstGeom prst="rect">
             <a:avLst/>
@@ -4412,13 +4169,13 @@
       </p:sp>
       <p:sp>
         <p:nvSpPr>
-          <p:cNvPr id="33" name="TextBox 32"/>
+          <p:cNvPr id="27" name="TextBox 26"/>
           <p:cNvSpPr txBox="1"/>
           <p:nvPr/>
         </p:nvSpPr>
         <p:spPr>
           <a:xfrm>
-            <a:off x="12527280" y="31181040"/>
+            <a:off x="12527280" y="14356080"/>
             <a:ext cx="7863840" cy="822960"/>
           </a:xfrm>
           <a:prstGeom prst="rect">
@@ -4442,7 +4199,7 @@
                 <a:solidFill>
                   <a:srgbClr val="9AAEC2"/>
                 </a:solidFill>
-                <a:latin typeface="Noto Sans KR"/>
+                <a:latin typeface="Arial"/>
               </a:rPr>
               <a:t>Place figure here</a:t>
             </a:r>
@@ -4451,13 +4208,13 @@
       </p:sp>
       <p:sp>
         <p:nvSpPr>
-          <p:cNvPr id="34" name="TextBox 33"/>
+          <p:cNvPr id="28" name="TextBox 27"/>
           <p:cNvSpPr txBox="1"/>
           <p:nvPr/>
         </p:nvSpPr>
         <p:spPr>
           <a:xfrm>
-            <a:off x="12527280" y="38404800"/>
+            <a:off x="12527280" y="21122640"/>
             <a:ext cx="7863840" cy="1005840"/>
           </a:xfrm>
           <a:prstGeom prst="rect">
@@ -4481,23 +4238,23 @@
                 <a:solidFill>
                   <a:srgbClr val="5B6F84"/>
                 </a:solidFill>
-                <a:latin typeface="Noto Sans KR"/>
+                <a:latin typeface="Arial"/>
               </a:rPr>
-              <a:t>Figure 2. Caption.</a:t>
-            </a:r>
-          </a:p>
-        </p:txBody>
-      </p:sp>
-      <p:sp>
-        <p:nvSpPr>
-          <p:cNvPr id="35" name="Rectangle 34"/>
+              <a:t>Figure 1. Caption describing what the reader should take from this panel.</a:t>
+            </a:r>
+          </a:p>
+        </p:txBody>
+      </p:sp>
+      <p:sp>
+        <p:nvSpPr>
+          <p:cNvPr id="29" name="Rectangle 28"/>
           <p:cNvSpPr/>
           <p:nvPr/>
         </p:nvSpPr>
         <p:spPr>
           <a:xfrm>
-            <a:off x="22128480" y="7132320"/>
-            <a:ext cx="9326880" cy="15544800"/>
+            <a:off x="11795760" y="23317200"/>
+            <a:ext cx="9326880" cy="17099280"/>
           </a:xfrm>
           <a:prstGeom prst="rect">
             <a:avLst/>
@@ -4535,14 +4292,14 @@
       </p:sp>
       <p:sp>
         <p:nvSpPr>
-          <p:cNvPr id="36" name="Rectangle 35"/>
+          <p:cNvPr id="30" name="Rectangle 29"/>
           <p:cNvSpPr/>
           <p:nvPr/>
         </p:nvSpPr>
         <p:spPr>
           <a:xfrm>
-            <a:off x="22128480" y="7132320"/>
-            <a:ext cx="9326880" cy="146304"/>
+            <a:off x="11795760" y="23317200"/>
+            <a:ext cx="9326880" cy="128016"/>
           </a:xfrm>
           <a:prstGeom prst="rect">
             <a:avLst/>
@@ -4586,14 +4343,59 @@
       </p:sp>
       <p:sp>
         <p:nvSpPr>
-          <p:cNvPr id="37" name="TextBox 36"/>
+          <p:cNvPr id="31" name="Rectangle 30"/>
+          <p:cNvSpPr/>
+          <p:nvPr/>
+        </p:nvSpPr>
+        <p:spPr>
+          <a:xfrm>
+            <a:off x="12527280" y="24094440"/>
+            <a:ext cx="7863840" cy="14493240"/>
+          </a:xfrm>
+          <a:prstGeom prst="rect">
+            <a:avLst/>
+          </a:prstGeom>
+          <a:solidFill>
+            <a:srgbClr val="F4F8FD"/>
+          </a:solidFill>
+          <a:ln w="12700">
+            <a:solidFill>
+              <a:srgbClr val="D6E2EE"/>
+            </a:solidFill>
+          </a:ln>
+        </p:spPr>
+        <p:style>
+          <a:lnRef idx="1">
+            <a:schemeClr val="accent1"/>
+          </a:lnRef>
+          <a:fillRef idx="3">
+            <a:schemeClr val="accent1"/>
+          </a:fillRef>
+          <a:effectRef idx="2">
+            <a:schemeClr val="accent1"/>
+          </a:effectRef>
+          <a:fontRef idx="minor">
+            <a:schemeClr val="lt1"/>
+          </a:fontRef>
+        </p:style>
+        <p:txBody>
+          <a:bodyPr rtlCol="0" anchor="ctr"/>
+          <a:lstStyle/>
+          <a:p>
+            <a:pPr algn="ctr"/>
+          </a:p>
+        </p:txBody>
+      </p:sp>
+      <p:sp>
+        <p:nvSpPr>
+          <p:cNvPr id="32" name="TextBox 31"/>
           <p:cNvSpPr txBox="1"/>
           <p:nvPr/>
         </p:nvSpPr>
         <p:spPr>
           <a:xfrm>
-            <a:off x="22860000" y="7726680"/>
-            <a:ext cx="7863840" cy="914400"/>
+            <a:off x="12527280" y="31409640"/>
+            <a:ext cx="7863840" cy="822960"/>
           </a:xfrm>
           <a:prstGeom prst="rect">
             <a:avLst/>
@@ -4606,33 +4408,117 @@
           </a:bodyPr>
           <a:lstStyle/>
           <a:p>
-            <a:pPr algn="l">
+            <a:pPr algn="ctr">
               <a:lnSpc>
                 <a:spcPct val="100000"/>
               </a:lnSpc>
             </a:pPr>
             <a:r>
-              <a:rPr sz="4000" b="1">
+              <a:rPr sz="3000" b="0">
                 <a:solidFill>
-                  <a:srgbClr val="0B2F5B"/>
+                  <a:srgbClr val="9AAEC2"/>
                 </a:solidFill>
-                <a:latin typeface="Noto Sans KR"/>
+                <a:latin typeface="Arial"/>
               </a:rPr>
-              <a:t>4. Results</a:t>
-            </a:r>
-          </a:p>
-        </p:txBody>
-      </p:sp>
-      <p:sp>
-        <p:nvSpPr>
-          <p:cNvPr id="38" name="Rectangle 37"/>
+              <a:t>Place figure here</a:t>
+            </a:r>
+          </a:p>
+        </p:txBody>
+      </p:sp>
+      <p:sp>
+        <p:nvSpPr>
+          <p:cNvPr id="33" name="TextBox 32"/>
+          <p:cNvSpPr txBox="1"/>
+          <p:nvPr/>
+        </p:nvSpPr>
+        <p:spPr>
+          <a:xfrm>
+            <a:off x="12527280" y="38953440"/>
+            <a:ext cx="7863840" cy="1005840"/>
+          </a:xfrm>
+          <a:prstGeom prst="rect">
+            <a:avLst/>
+          </a:prstGeom>
+          <a:noFill/>
+        </p:spPr>
+        <p:txBody>
+          <a:bodyPr wrap="square" lIns="0" rIns="0" tIns="0" bIns="0">
+            <a:spAutoFit/>
+          </a:bodyPr>
+          <a:lstStyle/>
+          <a:p>
+            <a:pPr algn="l">
+              <a:lnSpc>
+                <a:spcPct val="135000"/>
+              </a:lnSpc>
+            </a:pPr>
+            <a:r>
+              <a:rPr sz="2400" b="0">
+                <a:solidFill>
+                  <a:srgbClr val="5B6F84"/>
+                </a:solidFill>
+                <a:latin typeface="Arial"/>
+              </a:rPr>
+              <a:t>Figure 2. Caption.</a:t>
+            </a:r>
+          </a:p>
+        </p:txBody>
+      </p:sp>
+      <p:sp>
+        <p:nvSpPr>
+          <p:cNvPr id="34" name="Rectangle 33"/>
           <p:cNvSpPr/>
           <p:nvPr/>
         </p:nvSpPr>
         <p:spPr>
           <a:xfrm>
-            <a:off x="22860000" y="8732520"/>
-            <a:ext cx="3108960" cy="118872"/>
+            <a:off x="22128480" y="7040880"/>
+            <a:ext cx="9326880" cy="15544800"/>
+          </a:xfrm>
+          <a:prstGeom prst="rect">
+            <a:avLst/>
+          </a:prstGeom>
+          <a:solidFill>
+            <a:srgbClr val="FFFFFF"/>
+          </a:solidFill>
+          <a:ln w="12700">
+            <a:solidFill>
+              <a:srgbClr val="D6E2EE"/>
+            </a:solidFill>
+          </a:ln>
+        </p:spPr>
+        <p:style>
+          <a:lnRef idx="1">
+            <a:schemeClr val="accent1"/>
+          </a:lnRef>
+          <a:fillRef idx="3">
+            <a:schemeClr val="accent1"/>
+          </a:fillRef>
+          <a:effectRef idx="2">
+            <a:schemeClr val="accent1"/>
+          </a:effectRef>
+          <a:fontRef idx="minor">
+            <a:schemeClr val="lt1"/>
+          </a:fontRef>
+        </p:style>
+        <p:txBody>
+          <a:bodyPr rtlCol="0" anchor="ctr"/>
+          <a:lstStyle/>
+          <a:p>
+            <a:pPr algn="ctr"/>
+          </a:p>
+        </p:txBody>
+      </p:sp>
+      <p:sp>
+        <p:nvSpPr>
+          <p:cNvPr id="35" name="Rectangle 34"/>
+          <p:cNvSpPr/>
+          <p:nvPr/>
+        </p:nvSpPr>
+        <p:spPr>
+          <a:xfrm>
+            <a:off x="22128480" y="7040880"/>
+            <a:ext cx="9326880" cy="128016"/>
           </a:xfrm>
           <a:prstGeom prst="rect">
             <a:avLst/>
@@ -4676,14 +4562,14 @@
       </p:sp>
       <p:sp>
         <p:nvSpPr>
-          <p:cNvPr id="39" name="TextBox 38"/>
+          <p:cNvPr id="36" name="TextBox 35"/>
           <p:cNvSpPr txBox="1"/>
           <p:nvPr/>
         </p:nvSpPr>
         <p:spPr>
           <a:xfrm>
-            <a:off x="22860000" y="9235440"/>
-            <a:ext cx="7863840" cy="12801600"/>
+            <a:off x="22860000" y="7607808"/>
+            <a:ext cx="7863840" cy="914400"/>
           </a:xfrm>
           <a:prstGeom prst="rect">
             <a:avLst/>
@@ -4698,77 +4584,31 @@
           <a:p>
             <a:pPr algn="l">
               <a:lnSpc>
-                <a:spcPct val="145000"/>
+                <a:spcPct val="100000"/>
               </a:lnSpc>
             </a:pPr>
             <a:r>
-              <a:rPr sz="2600" b="0">
+              <a:rPr sz="4000" b="1">
                 <a:solidFill>
-                  <a:srgbClr val="5B6F84"/>
+                  <a:srgbClr val="0B2F5B"/>
                 </a:solidFill>
-                <a:latin typeface="Noto Sans KR"/>
+                <a:latin typeface="Arial"/>
               </a:rPr>
-              <a:t>Replace with your text. Body copy at this size stays readable from about 1.5 m, which is where people stand at a poster board.
-Keep each section to a few short paragraphs and let the figures carry the argument.</a:t>
-            </a:r>
-          </a:p>
-        </p:txBody>
-      </p:sp>
-      <p:sp>
-        <p:nvSpPr>
-          <p:cNvPr id="40" name="Rectangle 39"/>
+              <a:t>4. Results</a:t>
+            </a:r>
+          </a:p>
+        </p:txBody>
+      </p:sp>
+      <p:sp>
+        <p:nvSpPr>
+          <p:cNvPr id="37" name="Rectangle 36"/>
           <p:cNvSpPr/>
           <p:nvPr/>
         </p:nvSpPr>
         <p:spPr>
           <a:xfrm>
-            <a:off x="22128480" y="23408640"/>
-            <a:ext cx="9326880" cy="16459200"/>
-          </a:xfrm>
-          <a:prstGeom prst="rect">
-            <a:avLst/>
-          </a:prstGeom>
-          <a:solidFill>
-            <a:srgbClr val="FFFFFF"/>
-          </a:solidFill>
-          <a:ln w="12700">
-            <a:solidFill>
-              <a:srgbClr val="D6E2EE"/>
-            </a:solidFill>
-          </a:ln>
-        </p:spPr>
-        <p:style>
-          <a:lnRef idx="1">
-            <a:schemeClr val="accent1"/>
-          </a:lnRef>
-          <a:fillRef idx="3">
-            <a:schemeClr val="accent1"/>
-          </a:fillRef>
-          <a:effectRef idx="2">
-            <a:schemeClr val="accent1"/>
-          </a:effectRef>
-          <a:fontRef idx="minor">
-            <a:schemeClr val="lt1"/>
-          </a:fontRef>
-        </p:style>
-        <p:txBody>
-          <a:bodyPr rtlCol="0" anchor="ctr"/>
-          <a:lstStyle/>
-          <a:p>
-            <a:pPr algn="ctr"/>
-          </a:p>
-        </p:txBody>
-      </p:sp>
-      <p:sp>
-        <p:nvSpPr>
-          <p:cNvPr id="41" name="Rectangle 40"/>
-          <p:cNvSpPr/>
-          <p:nvPr/>
-        </p:nvSpPr>
-        <p:spPr>
-          <a:xfrm>
-            <a:off x="22128480" y="23408640"/>
-            <a:ext cx="9326880" cy="146304"/>
+            <a:off x="22860000" y="8613648"/>
+            <a:ext cx="3108960" cy="100584"/>
           </a:xfrm>
           <a:prstGeom prst="rect">
             <a:avLst/>
@@ -4812,14 +4652,14 @@
       </p:sp>
       <p:sp>
         <p:nvSpPr>
-          <p:cNvPr id="42" name="TextBox 41"/>
+          <p:cNvPr id="38" name="TextBox 37"/>
           <p:cNvSpPr txBox="1"/>
           <p:nvPr/>
         </p:nvSpPr>
         <p:spPr>
           <a:xfrm>
-            <a:off x="22860000" y="24003000"/>
-            <a:ext cx="7863840" cy="914400"/>
+            <a:off x="22860000" y="9107423"/>
+            <a:ext cx="7863840" cy="12801600"/>
           </a:xfrm>
           <a:prstGeom prst="rect">
             <a:avLst/>
@@ -4834,31 +4674,77 @@
           <a:p>
             <a:pPr algn="l">
               <a:lnSpc>
-                <a:spcPct val="100000"/>
+                <a:spcPct val="145000"/>
               </a:lnSpc>
             </a:pPr>
             <a:r>
-              <a:rPr sz="4000" b="1">
+              <a:rPr sz="2600" b="0">
                 <a:solidFill>
-                  <a:srgbClr val="0B2F5B"/>
+                  <a:srgbClr val="5B6F84"/>
                 </a:solidFill>
-                <a:latin typeface="Noto Sans KR"/>
+                <a:latin typeface="Arial"/>
               </a:rPr>
-              <a:t>5. Conclusions</a:t>
-            </a:r>
-          </a:p>
-        </p:txBody>
-      </p:sp>
-      <p:sp>
-        <p:nvSpPr>
-          <p:cNvPr id="43" name="Rectangle 42"/>
+              <a:t>Replace with your text. Body copy at this size stays readable from about 1.5 m, which is where people stand at a poster board.
+Keep each section to a few short paragraphs and let the figures carry the argument.</a:t>
+            </a:r>
+          </a:p>
+        </p:txBody>
+      </p:sp>
+      <p:sp>
+        <p:nvSpPr>
+          <p:cNvPr id="39" name="Rectangle 38"/>
           <p:cNvSpPr/>
           <p:nvPr/>
         </p:nvSpPr>
         <p:spPr>
           <a:xfrm>
-            <a:off x="22860000" y="25008840"/>
-            <a:ext cx="3108960" cy="118872"/>
+            <a:off x="22128480" y="23317200"/>
+            <a:ext cx="9326880" cy="17099280"/>
+          </a:xfrm>
+          <a:prstGeom prst="rect">
+            <a:avLst/>
+          </a:prstGeom>
+          <a:solidFill>
+            <a:srgbClr val="FFFFFF"/>
+          </a:solidFill>
+          <a:ln w="12700">
+            <a:solidFill>
+              <a:srgbClr val="D6E2EE"/>
+            </a:solidFill>
+          </a:ln>
+        </p:spPr>
+        <p:style>
+          <a:lnRef idx="1">
+            <a:schemeClr val="accent1"/>
+          </a:lnRef>
+          <a:fillRef idx="3">
+            <a:schemeClr val="accent1"/>
+          </a:fillRef>
+          <a:effectRef idx="2">
+            <a:schemeClr val="accent1"/>
+          </a:effectRef>
+          <a:fontRef idx="minor">
+            <a:schemeClr val="lt1"/>
+          </a:fontRef>
+        </p:style>
+        <p:txBody>
+          <a:bodyPr rtlCol="0" anchor="ctr"/>
+          <a:lstStyle/>
+          <a:p>
+            <a:pPr algn="ctr"/>
+          </a:p>
+        </p:txBody>
+      </p:sp>
+      <p:sp>
+        <p:nvSpPr>
+          <p:cNvPr id="40" name="Rectangle 39"/>
+          <p:cNvSpPr/>
+          <p:nvPr/>
+        </p:nvSpPr>
+        <p:spPr>
+          <a:xfrm>
+            <a:off x="22128480" y="23317200"/>
+            <a:ext cx="9326880" cy="128016"/>
           </a:xfrm>
           <a:prstGeom prst="rect">
             <a:avLst/>
@@ -4902,57 +4788,14 @@
       </p:sp>
       <p:sp>
         <p:nvSpPr>
-          <p:cNvPr id="44" name="Oval 43"/>
-          <p:cNvSpPr/>
-          <p:nvPr/>
-        </p:nvSpPr>
-        <p:spPr>
-          <a:xfrm>
-            <a:off x="22860000" y="25767792"/>
-            <a:ext cx="274320" cy="274320"/>
-          </a:xfrm>
-          <a:prstGeom prst="ellipse">
-            <a:avLst/>
-          </a:prstGeom>
-          <a:solidFill>
-            <a:srgbClr val="00ADA9"/>
-          </a:solidFill>
-          <a:ln>
-            <a:noFill/>
-          </a:ln>
-        </p:spPr>
-        <p:style>
-          <a:lnRef idx="1">
-            <a:schemeClr val="accent1"/>
-          </a:lnRef>
-          <a:fillRef idx="3">
-            <a:schemeClr val="accent1"/>
-          </a:fillRef>
-          <a:effectRef idx="2">
-            <a:schemeClr val="accent1"/>
-          </a:effectRef>
-          <a:fontRef idx="minor">
-            <a:schemeClr val="lt1"/>
-          </a:fontRef>
-        </p:style>
-        <p:txBody>
-          <a:bodyPr rtlCol="0" anchor="ctr"/>
-          <a:lstStyle/>
-          <a:p>
-            <a:pPr algn="ctr"/>
-          </a:p>
-        </p:txBody>
-      </p:sp>
-      <p:sp>
-        <p:nvSpPr>
-          <p:cNvPr id="45" name="TextBox 44"/>
+          <p:cNvPr id="41" name="TextBox 40"/>
           <p:cNvSpPr txBox="1"/>
           <p:nvPr/>
         </p:nvSpPr>
         <p:spPr>
           <a:xfrm>
-            <a:off x="23454360" y="25603200"/>
-            <a:ext cx="7223760" cy="1188720"/>
+            <a:off x="22860000" y="23884128"/>
+            <a:ext cx="7863840" cy="914400"/>
           </a:xfrm>
           <a:prstGeom prst="rect">
             <a:avLst/>
@@ -4967,234 +4810,31 @@
           <a:p>
             <a:pPr algn="l">
               <a:lnSpc>
-                <a:spcPct val="130000"/>
+                <a:spcPct val="100000"/>
               </a:lnSpc>
             </a:pPr>
             <a:r>
-              <a:rPr sz="2700" b="0">
+              <a:rPr sz="4000" b="1">
                 <a:solidFill>
                   <a:srgbClr val="0B2F5B"/>
                 </a:solidFill>
-                <a:latin typeface="Noto Sans KR"/>
+                <a:latin typeface="Arial"/>
               </a:rPr>
-              <a:t>First conclusion in one line.</a:t>
-            </a:r>
-          </a:p>
-        </p:txBody>
-      </p:sp>
-      <p:sp>
-        <p:nvSpPr>
-          <p:cNvPr id="46" name="Oval 45"/>
+              <a:t>5. Conclusions</a:t>
+            </a:r>
+          </a:p>
+        </p:txBody>
+      </p:sp>
+      <p:sp>
+        <p:nvSpPr>
+          <p:cNvPr id="42" name="Rectangle 41"/>
           <p:cNvSpPr/>
           <p:nvPr/>
         </p:nvSpPr>
         <p:spPr>
           <a:xfrm>
-            <a:off x="22860000" y="27230832"/>
-            <a:ext cx="274320" cy="274320"/>
-          </a:xfrm>
-          <a:prstGeom prst="ellipse">
-            <a:avLst/>
-          </a:prstGeom>
-          <a:solidFill>
-            <a:srgbClr val="00ADA9"/>
-          </a:solidFill>
-          <a:ln>
-            <a:noFill/>
-          </a:ln>
-        </p:spPr>
-        <p:style>
-          <a:lnRef idx="1">
-            <a:schemeClr val="accent1"/>
-          </a:lnRef>
-          <a:fillRef idx="3">
-            <a:schemeClr val="accent1"/>
-          </a:fillRef>
-          <a:effectRef idx="2">
-            <a:schemeClr val="accent1"/>
-          </a:effectRef>
-          <a:fontRef idx="minor">
-            <a:schemeClr val="lt1"/>
-          </a:fontRef>
-        </p:style>
-        <p:txBody>
-          <a:bodyPr rtlCol="0" anchor="ctr"/>
-          <a:lstStyle/>
-          <a:p>
-            <a:pPr algn="ctr"/>
-          </a:p>
-        </p:txBody>
-      </p:sp>
-      <p:sp>
-        <p:nvSpPr>
-          <p:cNvPr id="47" name="TextBox 46"/>
-          <p:cNvSpPr txBox="1"/>
-          <p:nvPr/>
-        </p:nvSpPr>
-        <p:spPr>
-          <a:xfrm>
-            <a:off x="23454360" y="27066240"/>
-            <a:ext cx="7223760" cy="1188720"/>
-          </a:xfrm>
-          <a:prstGeom prst="rect">
-            <a:avLst/>
-          </a:prstGeom>
-          <a:noFill/>
-        </p:spPr>
-        <p:txBody>
-          <a:bodyPr wrap="square" lIns="0" rIns="0" tIns="0" bIns="0">
-            <a:spAutoFit/>
-          </a:bodyPr>
-          <a:lstStyle/>
-          <a:p>
-            <a:pPr algn="l">
-              <a:lnSpc>
-                <a:spcPct val="130000"/>
-              </a:lnSpc>
-            </a:pPr>
-            <a:r>
-              <a:rPr sz="2700" b="0">
-                <a:solidFill>
-                  <a:srgbClr val="0B2F5B"/>
-                </a:solidFill>
-                <a:latin typeface="Noto Sans KR"/>
-              </a:rPr>
-              <a:t>Second conclusion.</a:t>
-            </a:r>
-          </a:p>
-        </p:txBody>
-      </p:sp>
-      <p:sp>
-        <p:nvSpPr>
-          <p:cNvPr id="48" name="Oval 47"/>
-          <p:cNvSpPr/>
-          <p:nvPr/>
-        </p:nvSpPr>
-        <p:spPr>
-          <a:xfrm>
-            <a:off x="22860000" y="28693872"/>
-            <a:ext cx="274320" cy="274320"/>
-          </a:xfrm>
-          <a:prstGeom prst="ellipse">
-            <a:avLst/>
-          </a:prstGeom>
-          <a:solidFill>
-            <a:srgbClr val="00ADA9"/>
-          </a:solidFill>
-          <a:ln>
-            <a:noFill/>
-          </a:ln>
-        </p:spPr>
-        <p:style>
-          <a:lnRef idx="1">
-            <a:schemeClr val="accent1"/>
-          </a:lnRef>
-          <a:fillRef idx="3">
-            <a:schemeClr val="accent1"/>
-          </a:fillRef>
-          <a:effectRef idx="2">
-            <a:schemeClr val="accent1"/>
-          </a:effectRef>
-          <a:fontRef idx="minor">
-            <a:schemeClr val="lt1"/>
-          </a:fontRef>
-        </p:style>
-        <p:txBody>
-          <a:bodyPr rtlCol="0" anchor="ctr"/>
-          <a:lstStyle/>
-          <a:p>
-            <a:pPr algn="ctr"/>
-          </a:p>
-        </p:txBody>
-      </p:sp>
-      <p:sp>
-        <p:nvSpPr>
-          <p:cNvPr id="49" name="TextBox 48"/>
-          <p:cNvSpPr txBox="1"/>
-          <p:nvPr/>
-        </p:nvSpPr>
-        <p:spPr>
-          <a:xfrm>
-            <a:off x="23454360" y="28529280"/>
-            <a:ext cx="7223760" cy="1188720"/>
-          </a:xfrm>
-          <a:prstGeom prst="rect">
-            <a:avLst/>
-          </a:prstGeom>
-          <a:noFill/>
-        </p:spPr>
-        <p:txBody>
-          <a:bodyPr wrap="square" lIns="0" rIns="0" tIns="0" bIns="0">
-            <a:spAutoFit/>
-          </a:bodyPr>
-          <a:lstStyle/>
-          <a:p>
-            <a:pPr algn="l">
-              <a:lnSpc>
-                <a:spcPct val="130000"/>
-              </a:lnSpc>
-            </a:pPr>
-            <a:r>
-              <a:rPr sz="2700" b="0">
-                <a:solidFill>
-                  <a:srgbClr val="0B2F5B"/>
-                </a:solidFill>
-                <a:latin typeface="Noto Sans KR"/>
-              </a:rPr>
-              <a:t>Third conclusion.</a:t>
-            </a:r>
-          </a:p>
-        </p:txBody>
-      </p:sp>
-      <p:sp>
-        <p:nvSpPr>
-          <p:cNvPr id="50" name="TextBox 49"/>
-          <p:cNvSpPr txBox="1"/>
-          <p:nvPr/>
-        </p:nvSpPr>
-        <p:spPr>
-          <a:xfrm>
-            <a:off x="22860000" y="30906720"/>
-            <a:ext cx="7863840" cy="2194560"/>
-          </a:xfrm>
-          <a:prstGeom prst="rect">
-            <a:avLst/>
-          </a:prstGeom>
-          <a:noFill/>
-        </p:spPr>
-        <p:txBody>
-          <a:bodyPr wrap="square" lIns="0" rIns="0" tIns="0" bIns="0">
-            <a:spAutoFit/>
-          </a:bodyPr>
-          <a:lstStyle/>
-          <a:p>
-            <a:pPr algn="l">
-              <a:lnSpc>
-                <a:spcPct val="140000"/>
-              </a:lnSpc>
-            </a:pPr>
-            <a:r>
-              <a:rPr sz="2300" b="0">
-                <a:solidFill>
-                  <a:srgbClr val="5B6F84"/>
-                </a:solidFill>
-                <a:latin typeface="Noto Sans KR"/>
-              </a:rPr>
-              <a:t>Acknowledgements. Funding source and grant number.</a:t>
-            </a:r>
-          </a:p>
-        </p:txBody>
-      </p:sp>
-      <p:sp>
-        <p:nvSpPr>
-          <p:cNvPr id="51" name="Rectangle 50"/>
-          <p:cNvSpPr/>
-          <p:nvPr/>
-        </p:nvSpPr>
-        <p:spPr>
-          <a:xfrm>
-            <a:off x="0" y="40965120"/>
-            <a:ext cx="32918400" cy="2926080"/>
+            <a:off x="22860000" y="24889968"/>
+            <a:ext cx="3108960" cy="100584"/>
           </a:xfrm>
           <a:prstGeom prst="rect">
             <a:avLst/>
@@ -5208,7 +4848,7 @@
                 <a:srgbClr val="00ADA9"/>
               </a:gs>
             </a:gsLst>
-            <a:lin scaled="0" ang="2700000"/>
+            <a:lin scaled="0" ang="0"/>
           </a:gradFill>
           <a:ln>
             <a:noFill/>
@@ -5238,14 +4878,350 @@
       </p:sp>
       <p:sp>
         <p:nvSpPr>
-          <p:cNvPr id="52" name="TextBox 51"/>
+          <p:cNvPr id="43" name="Oval 42"/>
+          <p:cNvSpPr/>
+          <p:nvPr/>
+        </p:nvSpPr>
+        <p:spPr>
+          <a:xfrm>
+            <a:off x="22860000" y="25584912"/>
+            <a:ext cx="274320" cy="274320"/>
+          </a:xfrm>
+          <a:prstGeom prst="ellipse">
+            <a:avLst/>
+          </a:prstGeom>
+          <a:solidFill>
+            <a:srgbClr val="00ADA9"/>
+          </a:solidFill>
+          <a:ln>
+            <a:noFill/>
+          </a:ln>
+        </p:spPr>
+        <p:style>
+          <a:lnRef idx="1">
+            <a:schemeClr val="accent1"/>
+          </a:lnRef>
+          <a:fillRef idx="3">
+            <a:schemeClr val="accent1"/>
+          </a:fillRef>
+          <a:effectRef idx="2">
+            <a:schemeClr val="accent1"/>
+          </a:effectRef>
+          <a:fontRef idx="minor">
+            <a:schemeClr val="lt1"/>
+          </a:fontRef>
+        </p:style>
+        <p:txBody>
+          <a:bodyPr rtlCol="0" anchor="ctr"/>
+          <a:lstStyle/>
+          <a:p>
+            <a:pPr algn="ctr"/>
+          </a:p>
+        </p:txBody>
+      </p:sp>
+      <p:sp>
+        <p:nvSpPr>
+          <p:cNvPr id="44" name="TextBox 43"/>
           <p:cNvSpPr txBox="1"/>
           <p:nvPr/>
         </p:nvSpPr>
         <p:spPr>
           <a:xfrm>
-            <a:off x="1463040" y="41788080"/>
-            <a:ext cx="20116800" cy="1280160"/>
+            <a:off x="23454360" y="25420320"/>
+            <a:ext cx="7223760" cy="1188720"/>
+          </a:xfrm>
+          <a:prstGeom prst="rect">
+            <a:avLst/>
+          </a:prstGeom>
+          <a:noFill/>
+        </p:spPr>
+        <p:txBody>
+          <a:bodyPr wrap="square" lIns="0" rIns="0" tIns="0" bIns="0">
+            <a:spAutoFit/>
+          </a:bodyPr>
+          <a:lstStyle/>
+          <a:p>
+            <a:pPr algn="l">
+              <a:lnSpc>
+                <a:spcPct val="130000"/>
+              </a:lnSpc>
+            </a:pPr>
+            <a:r>
+              <a:rPr sz="2700" b="0">
+                <a:solidFill>
+                  <a:srgbClr val="0B2F5B"/>
+                </a:solidFill>
+                <a:latin typeface="Arial"/>
+              </a:rPr>
+              <a:t>First conclusion in one line.</a:t>
+            </a:r>
+          </a:p>
+        </p:txBody>
+      </p:sp>
+      <p:sp>
+        <p:nvSpPr>
+          <p:cNvPr id="45" name="Oval 44"/>
+          <p:cNvSpPr/>
+          <p:nvPr/>
+        </p:nvSpPr>
+        <p:spPr>
+          <a:xfrm>
+            <a:off x="22860000" y="27047952"/>
+            <a:ext cx="274320" cy="274320"/>
+          </a:xfrm>
+          <a:prstGeom prst="ellipse">
+            <a:avLst/>
+          </a:prstGeom>
+          <a:solidFill>
+            <a:srgbClr val="00ADA9"/>
+          </a:solidFill>
+          <a:ln>
+            <a:noFill/>
+          </a:ln>
+        </p:spPr>
+        <p:style>
+          <a:lnRef idx="1">
+            <a:schemeClr val="accent1"/>
+          </a:lnRef>
+          <a:fillRef idx="3">
+            <a:schemeClr val="accent1"/>
+          </a:fillRef>
+          <a:effectRef idx="2">
+            <a:schemeClr val="accent1"/>
+          </a:effectRef>
+          <a:fontRef idx="minor">
+            <a:schemeClr val="lt1"/>
+          </a:fontRef>
+        </p:style>
+        <p:txBody>
+          <a:bodyPr rtlCol="0" anchor="ctr"/>
+          <a:lstStyle/>
+          <a:p>
+            <a:pPr algn="ctr"/>
+          </a:p>
+        </p:txBody>
+      </p:sp>
+      <p:sp>
+        <p:nvSpPr>
+          <p:cNvPr id="46" name="TextBox 45"/>
+          <p:cNvSpPr txBox="1"/>
+          <p:nvPr/>
+        </p:nvSpPr>
+        <p:spPr>
+          <a:xfrm>
+            <a:off x="23454360" y="26883360"/>
+            <a:ext cx="7223760" cy="1188720"/>
+          </a:xfrm>
+          <a:prstGeom prst="rect">
+            <a:avLst/>
+          </a:prstGeom>
+          <a:noFill/>
+        </p:spPr>
+        <p:txBody>
+          <a:bodyPr wrap="square" lIns="0" rIns="0" tIns="0" bIns="0">
+            <a:spAutoFit/>
+          </a:bodyPr>
+          <a:lstStyle/>
+          <a:p>
+            <a:pPr algn="l">
+              <a:lnSpc>
+                <a:spcPct val="130000"/>
+              </a:lnSpc>
+            </a:pPr>
+            <a:r>
+              <a:rPr sz="2700" b="0">
+                <a:solidFill>
+                  <a:srgbClr val="0B2F5B"/>
+                </a:solidFill>
+                <a:latin typeface="Arial"/>
+              </a:rPr>
+              <a:t>Second conclusion.</a:t>
+            </a:r>
+          </a:p>
+        </p:txBody>
+      </p:sp>
+      <p:sp>
+        <p:nvSpPr>
+          <p:cNvPr id="47" name="Oval 46"/>
+          <p:cNvSpPr/>
+          <p:nvPr/>
+        </p:nvSpPr>
+        <p:spPr>
+          <a:xfrm>
+            <a:off x="22860000" y="28510992"/>
+            <a:ext cx="274320" cy="274320"/>
+          </a:xfrm>
+          <a:prstGeom prst="ellipse">
+            <a:avLst/>
+          </a:prstGeom>
+          <a:solidFill>
+            <a:srgbClr val="00ADA9"/>
+          </a:solidFill>
+          <a:ln>
+            <a:noFill/>
+          </a:ln>
+        </p:spPr>
+        <p:style>
+          <a:lnRef idx="1">
+            <a:schemeClr val="accent1"/>
+          </a:lnRef>
+          <a:fillRef idx="3">
+            <a:schemeClr val="accent1"/>
+          </a:fillRef>
+          <a:effectRef idx="2">
+            <a:schemeClr val="accent1"/>
+          </a:effectRef>
+          <a:fontRef idx="minor">
+            <a:schemeClr val="lt1"/>
+          </a:fontRef>
+        </p:style>
+        <p:txBody>
+          <a:bodyPr rtlCol="0" anchor="ctr"/>
+          <a:lstStyle/>
+          <a:p>
+            <a:pPr algn="ctr"/>
+          </a:p>
+        </p:txBody>
+      </p:sp>
+      <p:sp>
+        <p:nvSpPr>
+          <p:cNvPr id="48" name="TextBox 47"/>
+          <p:cNvSpPr txBox="1"/>
+          <p:nvPr/>
+        </p:nvSpPr>
+        <p:spPr>
+          <a:xfrm>
+            <a:off x="23454360" y="28346400"/>
+            <a:ext cx="7223760" cy="1188720"/>
+          </a:xfrm>
+          <a:prstGeom prst="rect">
+            <a:avLst/>
+          </a:prstGeom>
+          <a:noFill/>
+        </p:spPr>
+        <p:txBody>
+          <a:bodyPr wrap="square" lIns="0" rIns="0" tIns="0" bIns="0">
+            <a:spAutoFit/>
+          </a:bodyPr>
+          <a:lstStyle/>
+          <a:p>
+            <a:pPr algn="l">
+              <a:lnSpc>
+                <a:spcPct val="130000"/>
+              </a:lnSpc>
+            </a:pPr>
+            <a:r>
+              <a:rPr sz="2700" b="0">
+                <a:solidFill>
+                  <a:srgbClr val="0B2F5B"/>
+                </a:solidFill>
+                <a:latin typeface="Arial"/>
+              </a:rPr>
+              <a:t>Third conclusion.</a:t>
+            </a:r>
+          </a:p>
+        </p:txBody>
+      </p:sp>
+      <p:sp>
+        <p:nvSpPr>
+          <p:cNvPr id="49" name="TextBox 48"/>
+          <p:cNvSpPr txBox="1"/>
+          <p:nvPr/>
+        </p:nvSpPr>
+        <p:spPr>
+          <a:xfrm>
+            <a:off x="22860000" y="30723840"/>
+            <a:ext cx="7863840" cy="2194560"/>
+          </a:xfrm>
+          <a:prstGeom prst="rect">
+            <a:avLst/>
+          </a:prstGeom>
+          <a:noFill/>
+        </p:spPr>
+        <p:txBody>
+          <a:bodyPr wrap="square" lIns="0" rIns="0" tIns="0" bIns="0">
+            <a:spAutoFit/>
+          </a:bodyPr>
+          <a:lstStyle/>
+          <a:p>
+            <a:pPr algn="l">
+              <a:lnSpc>
+                <a:spcPct val="140000"/>
+              </a:lnSpc>
+            </a:pPr>
+            <a:r>
+              <a:rPr sz="2300" b="0">
+                <a:solidFill>
+                  <a:srgbClr val="5B6F84"/>
+                </a:solidFill>
+                <a:latin typeface="Arial"/>
+              </a:rPr>
+              <a:t>Acknowledgements. Funding source and grant number.</a:t>
+            </a:r>
+          </a:p>
+        </p:txBody>
+      </p:sp>
+      <p:sp>
+        <p:nvSpPr>
+          <p:cNvPr id="50" name="Rectangle 49"/>
+          <p:cNvSpPr/>
+          <p:nvPr/>
+        </p:nvSpPr>
+        <p:spPr>
+          <a:xfrm>
+            <a:off x="0" y="41513760"/>
+            <a:ext cx="32918400" cy="109728"/>
+          </a:xfrm>
+          <a:prstGeom prst="rect">
+            <a:avLst/>
+          </a:prstGeom>
+          <a:gradFill rotWithShape="1">
+            <a:gsLst>
+              <a:gs pos="0">
+                <a:srgbClr val="0075C2"/>
+              </a:gs>
+              <a:gs pos="100000">
+                <a:srgbClr val="00ADA9"/>
+              </a:gs>
+            </a:gsLst>
+            <a:lin scaled="0" ang="0"/>
+          </a:gradFill>
+          <a:ln>
+            <a:noFill/>
+          </a:ln>
+        </p:spPr>
+        <p:style>
+          <a:lnRef idx="1">
+            <a:schemeClr val="accent1"/>
+          </a:lnRef>
+          <a:fillRef idx="3">
+            <a:schemeClr val="accent1"/>
+          </a:fillRef>
+          <a:effectRef idx="2">
+            <a:schemeClr val="accent1"/>
+          </a:effectRef>
+          <a:fontRef idx="minor">
+            <a:schemeClr val="lt1"/>
+          </a:fontRef>
+        </p:style>
+        <p:txBody>
+          <a:bodyPr rtlCol="0" anchor="ctr"/>
+          <a:lstStyle/>
+          <a:p>
+            <a:pPr algn="ctr"/>
+          </a:p>
+        </p:txBody>
+      </p:sp>
+      <p:sp>
+        <p:nvSpPr>
+          <p:cNvPr id="51" name="TextBox 50"/>
+          <p:cNvSpPr txBox="1"/>
+          <p:nvPr/>
+        </p:nvSpPr>
+        <p:spPr>
+          <a:xfrm>
+            <a:off x="1463040" y="42172128"/>
+            <a:ext cx="20116800" cy="1097280"/>
           </a:xfrm>
           <a:prstGeom prst="rect">
             <a:avLst/>
@@ -5264,11 +5240,11 @@
               </a:lnSpc>
             </a:pPr>
             <a:r>
-              <a:rPr sz="3400" b="1">
+              <a:rPr sz="3000" b="1">
                 <a:solidFill>
-                  <a:srgbClr val="FFFFFF"/>
+                  <a:srgbClr val="0B2F5B"/>
                 </a:solidFill>
-                <a:latin typeface="Noto Sans KR"/>
+                <a:latin typeface="Arial"/>
               </a:rPr>
               <a:t>Membrane-based Sustainable Separation Solutions Laboratory  •  KRICT</a:t>
             </a:r>
@@ -5277,13 +5253,13 @@
       </p:sp>
       <p:sp>
         <p:nvSpPr>
-          <p:cNvPr id="53" name="TextBox 52"/>
+          <p:cNvPr id="52" name="TextBox 51"/>
           <p:cNvSpPr txBox="1"/>
           <p:nvPr/>
         </p:nvSpPr>
         <p:spPr>
           <a:xfrm>
-            <a:off x="1463040" y="42748200"/>
+            <a:off x="1463040" y="42940224"/>
             <a:ext cx="20116800" cy="822960"/>
           </a:xfrm>
           <a:prstGeom prst="rect">
@@ -5303,11 +5279,11 @@
               </a:lnSpc>
             </a:pPr>
             <a:r>
-              <a:rPr sz="2600" b="0">
+              <a:rPr sz="2400" b="0">
                 <a:solidFill>
-                  <a:srgbClr val="CBECF1"/>
+                  <a:srgbClr val="5B6F84"/>
                 </a:solidFill>
-                <a:latin typeface="Noto Sans KR"/>
+                <a:latin typeface="Arial"/>
               </a:rPr>
               <a:t>jh.kim@krict.re.kr    •    +82-42-860-7506</a:t>
             </a:r>
@@ -5316,13 +5292,13 @@
       </p:sp>
       <p:sp>
         <p:nvSpPr>
-          <p:cNvPr id="54" name="TextBox 53"/>
+          <p:cNvPr id="53" name="TextBox 52"/>
           <p:cNvSpPr txBox="1"/>
           <p:nvPr/>
         </p:nvSpPr>
         <p:spPr>
           <a:xfrm>
-            <a:off x="19659600" y="42153840"/>
+            <a:off x="19659600" y="42473880"/>
             <a:ext cx="11795760" cy="914400"/>
           </a:xfrm>
           <a:prstGeom prst="rect">
@@ -5342,11 +5318,11 @@
               </a:lnSpc>
             </a:pPr>
             <a:r>
-              <a:rPr sz="2800" b="0">
+              <a:rPr sz="2600" b="0">
                 <a:solidFill>
-                  <a:srgbClr val="E2F4F7"/>
+                  <a:srgbClr val="0075C2"/>
                 </a:solidFill>
-                <a:latin typeface="Noto Sans KR"/>
+                <a:latin typeface="Arial"/>
               </a:rPr>
               <a:t>https://ms3l.org</a:t>
             </a:r>
